--- a/Review-1_EV.pptx
+++ b/Review-1_EV.pptx
@@ -208,7 +208,7 @@
           <a:p>
             <a:fld id="{36001E23-5FE6-4169-971A-5D36755E2E84}" type="datetimeFigureOut">
               <a:rPr lang="en-US" smtClean="0"/>
-              <a:t>07/09/2026</a:t>
+              <a:t>9/10/2026</a:t>
             </a:fld>
             <a:endParaRPr lang="en-US"/>
           </a:p>
@@ -503,6 +503,13 @@
           </p:nvPr>
         </p:nvSpPr>
         <p:spPr/>
+        <p:txBody>
+          <a:bodyPr/>
+          <a:lstStyle/>
+          <a:p>
+            <a:endParaRPr lang="en-IN"/>
+          </a:p>
+        </p:txBody>
       </p:sp>
       <p:sp>
         <p:nvSpPr>
@@ -4446,49 +4453,32 @@
       </p:pic>
       <p:pic>
         <p:nvPicPr>
-          <p:cNvPr id="1028" name="Picture 4" descr="LTM Limited: Business Creativity Partner for Digital Growth | Sreevarun MR posted on the topic | LinkedIn">
+          <p:cNvPr id="5" name="Picture 4">
             <a:extLst>
               <a:ext uri="{FF2B5EF4-FFF2-40B4-BE49-F238E27FC236}">
-                <a16:creationId xmlns:a16="http://schemas.microsoft.com/office/drawing/2014/main" id="{23C452DD-FAA5-45BB-648B-4A4E030EF3AA}"/>
+                <a16:creationId xmlns:a16="http://schemas.microsoft.com/office/drawing/2014/main" id="{ACCA5CD2-B055-9613-0BCC-4FF41EE92C03}"/>
               </a:ext>
             </a:extLst>
           </p:cNvPr>
           <p:cNvPicPr>
-            <a:picLocks noChangeAspect="1" noChangeArrowheads="1"/>
+            <a:picLocks noChangeAspect="1"/>
           </p:cNvPicPr>
           <p:nvPr/>
         </p:nvPicPr>
         <p:blipFill>
-          <a:blip r:embed="rId3">
-            <a:extLst>
-              <a:ext uri="{28A0092B-C50C-407E-A947-70E740481C1C}">
-                <a14:useLocalDpi xmlns:a14="http://schemas.microsoft.com/office/drawing/2010/main" val="0"/>
-              </a:ext>
-            </a:extLst>
-          </a:blip>
-          <a:srcRect/>
+          <a:blip r:embed="rId3"/>
           <a:stretch>
             <a:fillRect/>
           </a:stretch>
         </p:blipFill>
-        <p:spPr bwMode="auto">
+        <p:spPr>
           <a:xfrm>
-            <a:off x="180236" y="5852666"/>
-            <a:ext cx="2690483" cy="847418"/>
+            <a:off x="25856" y="5852667"/>
+            <a:ext cx="2116015" cy="707570"/>
           </a:xfrm>
           <a:prstGeom prst="rect">
             <a:avLst/>
           </a:prstGeom>
-          <a:noFill/>
-          <a:extLst>
-            <a:ext uri="{909E8E84-426E-40DD-AFC4-6F175D3DCCD1}">
-              <a14:hiddenFill xmlns:a14="http://schemas.microsoft.com/office/drawing/2010/main">
-                <a:solidFill>
-                  <a:srgbClr val="FFFFFF"/>
-                </a:solidFill>
-              </a14:hiddenFill>
-            </a:ext>
-          </a:extLst>
         </p:spPr>
       </p:pic>
     </p:spTree>
@@ -4543,105 +4533,96 @@
           <a:lstStyle/>
           <a:p>
             <a:r>
-              <a:rPr lang="en-US" dirty="0">
+              <a:rPr lang="en-IN" sz="2400" dirty="0">
                 <a:latin typeface="+mn-lt"/>
               </a:rPr>
-              <a:t>Module 3: Intelligent Procurement</a:t>
-            </a:r>
-          </a:p>
-          <a:p>
-            <a:r>
-              <a:rPr lang="en-US" b="0" dirty="0">
+              <a:t>Module 3: Intelligent Procurement — AI-Based Procurement Decision</a:t>
+            </a:r>
+          </a:p>
+          <a:p>
+            <a:pPr lvl="0"/>
+            <a:r>
+              <a:rPr lang="en-IN" sz="2400" b="0" dirty="0">
                 <a:latin typeface="+mn-lt"/>
               </a:rPr>
-              <a:t>• Subtopic: AI-Based Procurement Decision</a:t>
-            </a:r>
-            <a:br>
-              <a:rPr lang="en-US" b="0" dirty="0">
+              <a:t>Multi-criteria supplier ranking </a:t>
+            </a:r>
+          </a:p>
+          <a:p>
+            <a:pPr lvl="0"/>
+            <a:r>
+              <a:rPr lang="en-IN" sz="2400" b="0" dirty="0">
                 <a:latin typeface="+mn-lt"/>
               </a:rPr>
-            </a:br>
-            <a:r>
-              <a:rPr lang="en-US" b="0" dirty="0">
+              <a:t>Best supplier &amp; procurement quantity recommendation </a:t>
+            </a:r>
+          </a:p>
+          <a:p>
+            <a:pPr lvl="0"/>
+            <a:r>
+              <a:rPr lang="en-IN" sz="2400" b="0" dirty="0">
                 <a:latin typeface="+mn-lt"/>
               </a:rPr>
-              <a:t>• Multi-criteria supplier ranking</a:t>
-            </a:r>
-            <a:br>
-              <a:rPr lang="en-US" b="0" dirty="0">
+              <a:t>Cost, capacity, MOQ, availability &amp; lead-time evaluation </a:t>
+            </a:r>
+          </a:p>
+          <a:p>
+            <a:pPr lvl="0"/>
+            <a:r>
+              <a:rPr lang="en-IN" sz="2400" b="0" dirty="0">
                 <a:latin typeface="+mn-lt"/>
               </a:rPr>
-            </a:br>
-            <a:r>
-              <a:rPr lang="en-US" b="0" dirty="0">
+              <a:t>Risk-aware procurement decision support </a:t>
+            </a:r>
+          </a:p>
+          <a:p>
+            <a:pPr lvl="0"/>
+            <a:endParaRPr lang="en-IN" sz="2400" b="0" dirty="0">
+              <a:latin typeface="+mn-lt"/>
+            </a:endParaRPr>
+          </a:p>
+          <a:p>
+            <a:r>
+              <a:rPr lang="en-IN" sz="2400" dirty="0">
                 <a:latin typeface="+mn-lt"/>
               </a:rPr>
-              <a:t>• Best supplier &amp; procurement quantity recommendation</a:t>
-            </a:r>
-            <a:br>
-              <a:rPr lang="en-US" b="0" dirty="0">
+              <a:t>Module 4: Purchase Order Management — Procurement Execution &amp; Tracking</a:t>
+            </a:r>
+          </a:p>
+          <a:p>
+            <a:pPr lvl="0"/>
+            <a:r>
+              <a:rPr lang="en-IN" sz="2400" b="0" dirty="0">
                 <a:latin typeface="+mn-lt"/>
               </a:rPr>
-            </a:br>
-            <a:r>
-              <a:rPr lang="en-US" b="0" dirty="0">
+              <a:t>Automated purchase order generation </a:t>
+            </a:r>
+          </a:p>
+          <a:p>
+            <a:pPr lvl="0"/>
+            <a:r>
+              <a:rPr lang="en-IN" sz="2400" b="0" dirty="0">
                 <a:latin typeface="+mn-lt"/>
               </a:rPr>
-              <a:t>• Cost, capacity, MOQ &amp; lead-time evaluation</a:t>
-            </a:r>
-          </a:p>
-          <a:p>
-            <a:endParaRPr lang="en-US" b="0" dirty="0">
-              <a:latin typeface="+mn-lt"/>
-            </a:endParaRPr>
-          </a:p>
-          <a:p>
-            <a:r>
-              <a:rPr lang="en-US" dirty="0">
+              <a:t>Confirmation, dispatch, transit &amp; delivery tracking </a:t>
+            </a:r>
+          </a:p>
+          <a:p>
+            <a:pPr lvl="0"/>
+            <a:r>
+              <a:rPr lang="en-IN" sz="2400" b="0" dirty="0">
                 <a:latin typeface="+mn-lt"/>
               </a:rPr>
-              <a:t>Module 4: Purchase Order Management</a:t>
-            </a:r>
-          </a:p>
-          <a:p>
-            <a:r>
-              <a:rPr lang="en-US" b="0" dirty="0">
+              <a:t>Partial/full material receipt </a:t>
+            </a:r>
+          </a:p>
+          <a:p>
+            <a:pPr lvl="0"/>
+            <a:r>
+              <a:rPr lang="en-IN" sz="2400" b="0" dirty="0">
                 <a:latin typeface="+mn-lt"/>
               </a:rPr>
-              <a:t>• Subtopic: Procurement Execution &amp; Tracking</a:t>
-            </a:r>
-            <a:br>
-              <a:rPr lang="en-US" b="0" dirty="0">
-                <a:latin typeface="+mn-lt"/>
-              </a:rPr>
-            </a:br>
-            <a:r>
-              <a:rPr lang="en-US" b="0" dirty="0">
-                <a:latin typeface="+mn-lt"/>
-              </a:rPr>
-              <a:t>• Automated purchase order generation</a:t>
-            </a:r>
-            <a:br>
-              <a:rPr lang="en-US" b="0" dirty="0">
-                <a:latin typeface="+mn-lt"/>
-              </a:rPr>
-            </a:br>
-            <a:r>
-              <a:rPr lang="en-US" b="0" dirty="0">
-                <a:latin typeface="+mn-lt"/>
-              </a:rPr>
-              <a:t>• Order, dispatch &amp; delivery tracking</a:t>
-            </a:r>
-            <a:br>
-              <a:rPr lang="en-US" b="0" dirty="0">
-                <a:latin typeface="+mn-lt"/>
-              </a:rPr>
-            </a:br>
-            <a:r>
-              <a:rPr lang="en-US" b="0" dirty="0">
-                <a:latin typeface="+mn-lt"/>
-              </a:rPr>
-              <a:t>• Material receipt &amp; inventory update</a:t>
+              <a:t>Inventory &amp; supplier availability updates</a:t>
             </a:r>
           </a:p>
           <a:p>
@@ -4772,8 +4753,8 @@
         </p:nvSpPr>
         <p:spPr>
           <a:xfrm>
-            <a:off x="6093893" y="57036"/>
-            <a:ext cx="6098107" cy="646331"/>
+            <a:off x="3831771" y="57036"/>
+            <a:ext cx="8360229" cy="923330"/>
           </a:xfrm>
           <a:prstGeom prst="rect">
             <a:avLst/>
@@ -4786,15 +4767,22 @@
           </a:bodyPr>
           <a:lstStyle/>
           <a:p>
+            <a:pPr algn="ctr">
+              <a:defRPr/>
+            </a:pPr>
+            <a:r>
+              <a:rPr lang="en-US" b="1" dirty="0">
+                <a:solidFill>
+                  <a:prstClr val="white"/>
+                </a:solidFill>
+                <a:cs typeface="Calibri" panose="020F0502020204030204" pitchFamily="34" charset="0"/>
+              </a:rPr>
+              <a:t>Intelligent Supply Chain Management Platform for Electric Vehicle Manufacturing</a:t>
+            </a:r>
+          </a:p>
+          <a:p>
             <a:pPr algn="r"/>
-            <a:r>
-              <a:rPr lang="en-US" b="1" i="1" dirty="0">
-                <a:solidFill>
-                  <a:srgbClr val="FFFFFF"/>
-                </a:solidFill>
-              </a:rPr>
-              <a:t>Project Title -  Calibri body 18</a:t>
-            </a:r>
+            <a:endParaRPr lang="en-US" dirty="0"/>
           </a:p>
           <a:p>
             <a:pPr algn="r"/>
@@ -5006,7 +4994,7 @@
                                         <p:tgtEl>
                                           <p:spTgt spid="2">
                                             <p:txEl>
-                                              <p:pRg st="3" end="3"/>
+                                              <p:pRg st="2" end="2"/>
                                             </p:txEl>
                                           </p:spTgt>
                                         </p:tgtEl>
@@ -5055,7 +5043,301 @@
                                         <p:tgtEl>
                                           <p:spTgt spid="2">
                                             <p:txEl>
+                                              <p:pRg st="3" end="3"/>
+                                            </p:txEl>
+                                          </p:spTgt>
+                                        </p:tgtEl>
+                                        <p:attrNameLst>
+                                          <p:attrName>style.visibility</p:attrName>
+                                        </p:attrNameLst>
+                                      </p:cBhvr>
+                                      <p:to>
+                                        <p:strVal val="visible"/>
+                                      </p:to>
+                                    </p:set>
+                                  </p:childTnLst>
+                                </p:cTn>
+                              </p:par>
+                            </p:childTnLst>
+                          </p:cTn>
+                        </p:par>
+                      </p:childTnLst>
+                    </p:cTn>
+                  </p:par>
+                  <p:par>
+                    <p:cTn id="23" fill="hold">
+                      <p:stCondLst>
+                        <p:cond delay="indefinite"/>
+                      </p:stCondLst>
+                      <p:childTnLst>
+                        <p:par>
+                          <p:cTn id="24" fill="hold">
+                            <p:stCondLst>
+                              <p:cond delay="0"/>
+                            </p:stCondLst>
+                            <p:childTnLst>
+                              <p:par>
+                                <p:cTn id="25" presetID="1" presetClass="entr" presetSubtype="0" fill="hold" grpId="0" nodeType="clickEffect">
+                                  <p:stCondLst>
+                                    <p:cond delay="0"/>
+                                  </p:stCondLst>
+                                  <p:childTnLst>
+                                    <p:set>
+                                      <p:cBhvr>
+                                        <p:cTn id="26" dur="1" fill="hold">
+                                          <p:stCondLst>
+                                            <p:cond delay="0"/>
+                                          </p:stCondLst>
+                                        </p:cTn>
+                                        <p:tgtEl>
+                                          <p:spTgt spid="2">
+                                            <p:txEl>
                                               <p:pRg st="4" end="4"/>
+                                            </p:txEl>
+                                          </p:spTgt>
+                                        </p:tgtEl>
+                                        <p:attrNameLst>
+                                          <p:attrName>style.visibility</p:attrName>
+                                        </p:attrNameLst>
+                                      </p:cBhvr>
+                                      <p:to>
+                                        <p:strVal val="visible"/>
+                                      </p:to>
+                                    </p:set>
+                                  </p:childTnLst>
+                                </p:cTn>
+                              </p:par>
+                            </p:childTnLst>
+                          </p:cTn>
+                        </p:par>
+                      </p:childTnLst>
+                    </p:cTn>
+                  </p:par>
+                  <p:par>
+                    <p:cTn id="27" fill="hold">
+                      <p:stCondLst>
+                        <p:cond delay="indefinite"/>
+                      </p:stCondLst>
+                      <p:childTnLst>
+                        <p:par>
+                          <p:cTn id="28" fill="hold">
+                            <p:stCondLst>
+                              <p:cond delay="0"/>
+                            </p:stCondLst>
+                            <p:childTnLst>
+                              <p:par>
+                                <p:cTn id="29" presetID="1" presetClass="entr" presetSubtype="0" fill="hold" grpId="0" nodeType="clickEffect">
+                                  <p:stCondLst>
+                                    <p:cond delay="0"/>
+                                  </p:stCondLst>
+                                  <p:childTnLst>
+                                    <p:set>
+                                      <p:cBhvr>
+                                        <p:cTn id="30" dur="1" fill="hold">
+                                          <p:stCondLst>
+                                            <p:cond delay="0"/>
+                                          </p:stCondLst>
+                                        </p:cTn>
+                                        <p:tgtEl>
+                                          <p:spTgt spid="2">
+                                            <p:txEl>
+                                              <p:pRg st="6" end="6"/>
+                                            </p:txEl>
+                                          </p:spTgt>
+                                        </p:tgtEl>
+                                        <p:attrNameLst>
+                                          <p:attrName>style.visibility</p:attrName>
+                                        </p:attrNameLst>
+                                      </p:cBhvr>
+                                      <p:to>
+                                        <p:strVal val="visible"/>
+                                      </p:to>
+                                    </p:set>
+                                  </p:childTnLst>
+                                </p:cTn>
+                              </p:par>
+                            </p:childTnLst>
+                          </p:cTn>
+                        </p:par>
+                      </p:childTnLst>
+                    </p:cTn>
+                  </p:par>
+                  <p:par>
+                    <p:cTn id="31" fill="hold">
+                      <p:stCondLst>
+                        <p:cond delay="indefinite"/>
+                      </p:stCondLst>
+                      <p:childTnLst>
+                        <p:par>
+                          <p:cTn id="32" fill="hold">
+                            <p:stCondLst>
+                              <p:cond delay="0"/>
+                            </p:stCondLst>
+                            <p:childTnLst>
+                              <p:par>
+                                <p:cTn id="33" presetID="1" presetClass="entr" presetSubtype="0" fill="hold" grpId="0" nodeType="clickEffect">
+                                  <p:stCondLst>
+                                    <p:cond delay="0"/>
+                                  </p:stCondLst>
+                                  <p:childTnLst>
+                                    <p:set>
+                                      <p:cBhvr>
+                                        <p:cTn id="34" dur="1" fill="hold">
+                                          <p:stCondLst>
+                                            <p:cond delay="0"/>
+                                          </p:stCondLst>
+                                        </p:cTn>
+                                        <p:tgtEl>
+                                          <p:spTgt spid="2">
+                                            <p:txEl>
+                                              <p:pRg st="7" end="7"/>
+                                            </p:txEl>
+                                          </p:spTgt>
+                                        </p:tgtEl>
+                                        <p:attrNameLst>
+                                          <p:attrName>style.visibility</p:attrName>
+                                        </p:attrNameLst>
+                                      </p:cBhvr>
+                                      <p:to>
+                                        <p:strVal val="visible"/>
+                                      </p:to>
+                                    </p:set>
+                                  </p:childTnLst>
+                                </p:cTn>
+                              </p:par>
+                            </p:childTnLst>
+                          </p:cTn>
+                        </p:par>
+                      </p:childTnLst>
+                    </p:cTn>
+                  </p:par>
+                  <p:par>
+                    <p:cTn id="35" fill="hold">
+                      <p:stCondLst>
+                        <p:cond delay="indefinite"/>
+                      </p:stCondLst>
+                      <p:childTnLst>
+                        <p:par>
+                          <p:cTn id="36" fill="hold">
+                            <p:stCondLst>
+                              <p:cond delay="0"/>
+                            </p:stCondLst>
+                            <p:childTnLst>
+                              <p:par>
+                                <p:cTn id="37" presetID="1" presetClass="entr" presetSubtype="0" fill="hold" grpId="0" nodeType="clickEffect">
+                                  <p:stCondLst>
+                                    <p:cond delay="0"/>
+                                  </p:stCondLst>
+                                  <p:childTnLst>
+                                    <p:set>
+                                      <p:cBhvr>
+                                        <p:cTn id="38" dur="1" fill="hold">
+                                          <p:stCondLst>
+                                            <p:cond delay="0"/>
+                                          </p:stCondLst>
+                                        </p:cTn>
+                                        <p:tgtEl>
+                                          <p:spTgt spid="2">
+                                            <p:txEl>
+                                              <p:pRg st="8" end="8"/>
+                                            </p:txEl>
+                                          </p:spTgt>
+                                        </p:tgtEl>
+                                        <p:attrNameLst>
+                                          <p:attrName>style.visibility</p:attrName>
+                                        </p:attrNameLst>
+                                      </p:cBhvr>
+                                      <p:to>
+                                        <p:strVal val="visible"/>
+                                      </p:to>
+                                    </p:set>
+                                  </p:childTnLst>
+                                </p:cTn>
+                              </p:par>
+                            </p:childTnLst>
+                          </p:cTn>
+                        </p:par>
+                      </p:childTnLst>
+                    </p:cTn>
+                  </p:par>
+                  <p:par>
+                    <p:cTn id="39" fill="hold">
+                      <p:stCondLst>
+                        <p:cond delay="indefinite"/>
+                      </p:stCondLst>
+                      <p:childTnLst>
+                        <p:par>
+                          <p:cTn id="40" fill="hold">
+                            <p:stCondLst>
+                              <p:cond delay="0"/>
+                            </p:stCondLst>
+                            <p:childTnLst>
+                              <p:par>
+                                <p:cTn id="41" presetID="1" presetClass="entr" presetSubtype="0" fill="hold" grpId="0" nodeType="clickEffect">
+                                  <p:stCondLst>
+                                    <p:cond delay="0"/>
+                                  </p:stCondLst>
+                                  <p:childTnLst>
+                                    <p:set>
+                                      <p:cBhvr>
+                                        <p:cTn id="42" dur="1" fill="hold">
+                                          <p:stCondLst>
+                                            <p:cond delay="0"/>
+                                          </p:stCondLst>
+                                        </p:cTn>
+                                        <p:tgtEl>
+                                          <p:spTgt spid="2">
+                                            <p:txEl>
+                                              <p:pRg st="9" end="9"/>
+                                            </p:txEl>
+                                          </p:spTgt>
+                                        </p:tgtEl>
+                                        <p:attrNameLst>
+                                          <p:attrName>style.visibility</p:attrName>
+                                        </p:attrNameLst>
+                                      </p:cBhvr>
+                                      <p:to>
+                                        <p:strVal val="visible"/>
+                                      </p:to>
+                                    </p:set>
+                                  </p:childTnLst>
+                                </p:cTn>
+                              </p:par>
+                            </p:childTnLst>
+                          </p:cTn>
+                        </p:par>
+                      </p:childTnLst>
+                    </p:cTn>
+                  </p:par>
+                  <p:par>
+                    <p:cTn id="43" fill="hold">
+                      <p:stCondLst>
+                        <p:cond delay="indefinite"/>
+                      </p:stCondLst>
+                      <p:childTnLst>
+                        <p:par>
+                          <p:cTn id="44" fill="hold">
+                            <p:stCondLst>
+                              <p:cond delay="0"/>
+                            </p:stCondLst>
+                            <p:childTnLst>
+                              <p:par>
+                                <p:cTn id="45" presetID="1" presetClass="entr" presetSubtype="0" fill="hold" grpId="0" nodeType="clickEffect">
+                                  <p:stCondLst>
+                                    <p:cond delay="0"/>
+                                  </p:stCondLst>
+                                  <p:childTnLst>
+                                    <p:set>
+                                      <p:cBhvr>
+                                        <p:cTn id="46" dur="1" fill="hold">
+                                          <p:stCondLst>
+                                            <p:cond delay="0"/>
+                                          </p:stCondLst>
+                                        </p:cTn>
+                                        <p:tgtEl>
+                                          <p:spTgt spid="2">
+                                            <p:txEl>
+                                              <p:pRg st="10" end="10"/>
                                             </p:txEl>
                                           </p:spTgt>
                                         </p:tgtEl>
@@ -5148,106 +5430,103 @@
           <a:bodyPr/>
           <a:lstStyle/>
           <a:p>
-            <a:r>
-              <a:rPr lang="en-US" dirty="0">
+            <a:pPr marL="0" indent="0">
+              <a:buNone/>
+            </a:pPr>
+            <a:r>
+              <a:rPr lang="en-IN" sz="2400" dirty="0">
                 <a:latin typeface="+mn-lt"/>
               </a:rPr>
-              <a:t>Module 5: Supply Chain Knowledge Intelligence</a:t>
-            </a:r>
-          </a:p>
-          <a:p>
-            <a:r>
-              <a:rPr lang="en-US" b="0" dirty="0">
+              <a:t>Module 5: Supply Chain Knowledge Intelligence — Knowledge Graph &amp; Graph-RAG</a:t>
+            </a:r>
+          </a:p>
+          <a:p>
+            <a:pPr lvl="0"/>
+            <a:r>
+              <a:rPr lang="en-IN" sz="2400" b="0" dirty="0">
                 <a:latin typeface="+mn-lt"/>
               </a:rPr>
-              <a:t>• Subtopic: Knowledge Graph &amp; Graph-RAG</a:t>
-            </a:r>
-            <a:br>
-              <a:rPr lang="en-US" b="0" dirty="0">
+              <a:t>Vehicle–BOM–component–supplier–inventory–PO relationship mapping </a:t>
+            </a:r>
+          </a:p>
+          <a:p>
+            <a:pPr lvl="0"/>
+            <a:r>
+              <a:rPr lang="en-IN" sz="2400" b="0" dirty="0">
                 <a:latin typeface="+mn-lt"/>
               </a:rPr>
-            </a:br>
-            <a:r>
-              <a:rPr lang="en-US" b="0" dirty="0">
+              <a:t>Neo4j-based supply-chain Knowledge Graph </a:t>
+            </a:r>
+          </a:p>
+          <a:p>
+            <a:pPr lvl="0"/>
+            <a:r>
+              <a:rPr lang="en-IN" sz="2400" b="0" dirty="0">
                 <a:latin typeface="+mn-lt"/>
               </a:rPr>
-              <a:t>• Vehicle, component, supplier &amp; procurement relationship mapping</a:t>
-            </a:r>
-            <a:br>
-              <a:rPr lang="en-US" b="0" dirty="0">
+              <a:t>Graph-RAG + LLM-based intelligent querying </a:t>
+            </a:r>
+          </a:p>
+          <a:p>
+            <a:pPr lvl="0"/>
+            <a:r>
+              <a:rPr lang="en-IN" sz="2400" b="0" dirty="0">
                 <a:latin typeface="+mn-lt"/>
               </a:rPr>
-            </a:br>
-            <a:r>
-              <a:rPr lang="en-US" b="0" dirty="0">
+              <a:t>Context-aware supply-chain knowledge retrieval </a:t>
+            </a:r>
+          </a:p>
+          <a:p>
+            <a:pPr lvl="0"/>
+            <a:endParaRPr lang="en-IN" sz="2400" b="0" dirty="0">
+              <a:latin typeface="+mn-lt"/>
+            </a:endParaRPr>
+          </a:p>
+          <a:p>
+            <a:pPr marL="0" indent="0">
+              <a:buNone/>
+            </a:pPr>
+            <a:r>
+              <a:rPr lang="en-IN" sz="2400" dirty="0">
                 <a:latin typeface="+mn-lt"/>
               </a:rPr>
-              <a:t>• Neo4j-based supply-chain Knowledge Graph</a:t>
-            </a:r>
-            <a:br>
-              <a:rPr lang="en-US" b="0" dirty="0">
+              <a:t>Module 6: Agentic AI Decision Support — Autonomous Supply Chain Intelligence</a:t>
+            </a:r>
+          </a:p>
+          <a:p>
+            <a:pPr lvl="0"/>
+            <a:r>
+              <a:rPr lang="en-IN" sz="2400" b="0" dirty="0">
                 <a:latin typeface="+mn-lt"/>
               </a:rPr>
-            </a:br>
-            <a:r>
-              <a:rPr lang="en-US" b="0" dirty="0">
+              <a:t>Inventory, Supplier, Procurement &amp; Risk AI agents </a:t>
+            </a:r>
+          </a:p>
+          <a:p>
+            <a:pPr lvl="0"/>
+            <a:r>
+              <a:rPr lang="en-IN" sz="2400" b="0" dirty="0">
                 <a:latin typeface="+mn-lt"/>
               </a:rPr>
-              <a:t>• Graph-RAG and LLM-based intelligent querying</a:t>
-            </a:r>
-          </a:p>
-          <a:p>
-            <a:endParaRPr lang="en-US" b="0" dirty="0">
-              <a:latin typeface="+mn-lt"/>
-            </a:endParaRPr>
-          </a:p>
-          <a:p>
-            <a:r>
-              <a:rPr lang="en-US" dirty="0">
+              <a:t>Multi-agent coordination and reasoning </a:t>
+            </a:r>
+          </a:p>
+          <a:p>
+            <a:pPr lvl="0"/>
+            <a:r>
+              <a:rPr lang="en-IN" sz="2400" b="0" dirty="0">
                 <a:latin typeface="+mn-lt"/>
               </a:rPr>
-              <a:t>Module 6: Agentic AI Decision Support</a:t>
-            </a:r>
-          </a:p>
-          <a:p>
-            <a:r>
-              <a:rPr lang="en-US" b="0" dirty="0">
+              <a:t>Intelligent alerts &amp; recommendations </a:t>
+            </a:r>
+          </a:p>
+          <a:p>
+            <a:pPr lvl="0"/>
+            <a:r>
+              <a:rPr lang="en-IN" sz="2400" b="0" dirty="0">
                 <a:latin typeface="+mn-lt"/>
               </a:rPr>
-              <a:t>• Subtopic: Autonomous Supply Chain Intelligence</a:t>
-            </a:r>
-            <a:br>
-              <a:rPr lang="en-US" b="0" dirty="0">
-                <a:latin typeface="+mn-lt"/>
-              </a:rPr>
-            </a:br>
-            <a:r>
-              <a:rPr lang="en-US" b="0" dirty="0">
-                <a:latin typeface="+mn-lt"/>
-              </a:rPr>
-              <a:t>• Inventory, supplier, procurement &amp; risk AI agents</a:t>
-            </a:r>
-            <a:br>
-              <a:rPr lang="en-US" b="0" dirty="0">
-                <a:latin typeface="+mn-lt"/>
-              </a:rPr>
-            </a:br>
-            <a:r>
-              <a:rPr lang="en-US" b="0" dirty="0">
-                <a:latin typeface="+mn-lt"/>
-              </a:rPr>
-              <a:t>• Multi-agent coordination and analysis</a:t>
-            </a:r>
-            <a:br>
-              <a:rPr lang="en-US" b="0" dirty="0">
-                <a:latin typeface="+mn-lt"/>
-              </a:rPr>
-            </a:br>
-            <a:r>
-              <a:rPr lang="en-US" b="0" dirty="0">
-                <a:latin typeface="+mn-lt"/>
-              </a:rPr>
-              <a:t>• Intelligent alerts, recommendations &amp; decision support</a:t>
+              <a:t>Explainable, context-aware decision support</a:t>
             </a:r>
           </a:p>
           <a:p>
@@ -5378,8 +5657,8 @@
         </p:nvSpPr>
         <p:spPr>
           <a:xfrm>
-            <a:off x="6093893" y="57036"/>
-            <a:ext cx="6098107" cy="646331"/>
+            <a:off x="3715657" y="57036"/>
+            <a:ext cx="8476343" cy="923330"/>
           </a:xfrm>
           <a:prstGeom prst="rect">
             <a:avLst/>
@@ -5392,15 +5671,22 @@
           </a:bodyPr>
           <a:lstStyle/>
           <a:p>
+            <a:pPr algn="ctr">
+              <a:defRPr/>
+            </a:pPr>
+            <a:r>
+              <a:rPr lang="en-US" b="1" dirty="0">
+                <a:solidFill>
+                  <a:prstClr val="white"/>
+                </a:solidFill>
+                <a:cs typeface="Calibri" panose="020F0502020204030204" pitchFamily="34" charset="0"/>
+              </a:rPr>
+              <a:t>Intelligent Supply Chain Management Platform for Electric Vehicle Manufacturing</a:t>
+            </a:r>
+          </a:p>
+          <a:p>
             <a:pPr algn="r"/>
-            <a:r>
-              <a:rPr lang="en-US" b="1" i="1" dirty="0">
-                <a:solidFill>
-                  <a:srgbClr val="FFFFFF"/>
-                </a:solidFill>
-              </a:rPr>
-              <a:t>Project Title -  Calibri body 18</a:t>
-            </a:r>
+            <a:endParaRPr lang="en-US" dirty="0"/>
           </a:p>
           <a:p>
             <a:pPr algn="r"/>
@@ -5612,7 +5898,7 @@
                                         <p:tgtEl>
                                           <p:spTgt spid="2">
                                             <p:txEl>
-                                              <p:pRg st="3" end="3"/>
+                                              <p:pRg st="2" end="2"/>
                                             </p:txEl>
                                           </p:spTgt>
                                         </p:tgtEl>
@@ -5661,7 +5947,301 @@
                                         <p:tgtEl>
                                           <p:spTgt spid="2">
                                             <p:txEl>
+                                              <p:pRg st="3" end="3"/>
+                                            </p:txEl>
+                                          </p:spTgt>
+                                        </p:tgtEl>
+                                        <p:attrNameLst>
+                                          <p:attrName>style.visibility</p:attrName>
+                                        </p:attrNameLst>
+                                      </p:cBhvr>
+                                      <p:to>
+                                        <p:strVal val="visible"/>
+                                      </p:to>
+                                    </p:set>
+                                  </p:childTnLst>
+                                </p:cTn>
+                              </p:par>
+                            </p:childTnLst>
+                          </p:cTn>
+                        </p:par>
+                      </p:childTnLst>
+                    </p:cTn>
+                  </p:par>
+                  <p:par>
+                    <p:cTn id="23" fill="hold">
+                      <p:stCondLst>
+                        <p:cond delay="indefinite"/>
+                      </p:stCondLst>
+                      <p:childTnLst>
+                        <p:par>
+                          <p:cTn id="24" fill="hold">
+                            <p:stCondLst>
+                              <p:cond delay="0"/>
+                            </p:stCondLst>
+                            <p:childTnLst>
+                              <p:par>
+                                <p:cTn id="25" presetID="1" presetClass="entr" presetSubtype="0" fill="hold" grpId="0" nodeType="clickEffect">
+                                  <p:stCondLst>
+                                    <p:cond delay="0"/>
+                                  </p:stCondLst>
+                                  <p:childTnLst>
+                                    <p:set>
+                                      <p:cBhvr>
+                                        <p:cTn id="26" dur="1" fill="hold">
+                                          <p:stCondLst>
+                                            <p:cond delay="0"/>
+                                          </p:stCondLst>
+                                        </p:cTn>
+                                        <p:tgtEl>
+                                          <p:spTgt spid="2">
+                                            <p:txEl>
                                               <p:pRg st="4" end="4"/>
+                                            </p:txEl>
+                                          </p:spTgt>
+                                        </p:tgtEl>
+                                        <p:attrNameLst>
+                                          <p:attrName>style.visibility</p:attrName>
+                                        </p:attrNameLst>
+                                      </p:cBhvr>
+                                      <p:to>
+                                        <p:strVal val="visible"/>
+                                      </p:to>
+                                    </p:set>
+                                  </p:childTnLst>
+                                </p:cTn>
+                              </p:par>
+                            </p:childTnLst>
+                          </p:cTn>
+                        </p:par>
+                      </p:childTnLst>
+                    </p:cTn>
+                  </p:par>
+                  <p:par>
+                    <p:cTn id="27" fill="hold">
+                      <p:stCondLst>
+                        <p:cond delay="indefinite"/>
+                      </p:stCondLst>
+                      <p:childTnLst>
+                        <p:par>
+                          <p:cTn id="28" fill="hold">
+                            <p:stCondLst>
+                              <p:cond delay="0"/>
+                            </p:stCondLst>
+                            <p:childTnLst>
+                              <p:par>
+                                <p:cTn id="29" presetID="1" presetClass="entr" presetSubtype="0" fill="hold" grpId="0" nodeType="clickEffect">
+                                  <p:stCondLst>
+                                    <p:cond delay="0"/>
+                                  </p:stCondLst>
+                                  <p:childTnLst>
+                                    <p:set>
+                                      <p:cBhvr>
+                                        <p:cTn id="30" dur="1" fill="hold">
+                                          <p:stCondLst>
+                                            <p:cond delay="0"/>
+                                          </p:stCondLst>
+                                        </p:cTn>
+                                        <p:tgtEl>
+                                          <p:spTgt spid="2">
+                                            <p:txEl>
+                                              <p:pRg st="6" end="6"/>
+                                            </p:txEl>
+                                          </p:spTgt>
+                                        </p:tgtEl>
+                                        <p:attrNameLst>
+                                          <p:attrName>style.visibility</p:attrName>
+                                        </p:attrNameLst>
+                                      </p:cBhvr>
+                                      <p:to>
+                                        <p:strVal val="visible"/>
+                                      </p:to>
+                                    </p:set>
+                                  </p:childTnLst>
+                                </p:cTn>
+                              </p:par>
+                            </p:childTnLst>
+                          </p:cTn>
+                        </p:par>
+                      </p:childTnLst>
+                    </p:cTn>
+                  </p:par>
+                  <p:par>
+                    <p:cTn id="31" fill="hold">
+                      <p:stCondLst>
+                        <p:cond delay="indefinite"/>
+                      </p:stCondLst>
+                      <p:childTnLst>
+                        <p:par>
+                          <p:cTn id="32" fill="hold">
+                            <p:stCondLst>
+                              <p:cond delay="0"/>
+                            </p:stCondLst>
+                            <p:childTnLst>
+                              <p:par>
+                                <p:cTn id="33" presetID="1" presetClass="entr" presetSubtype="0" fill="hold" grpId="0" nodeType="clickEffect">
+                                  <p:stCondLst>
+                                    <p:cond delay="0"/>
+                                  </p:stCondLst>
+                                  <p:childTnLst>
+                                    <p:set>
+                                      <p:cBhvr>
+                                        <p:cTn id="34" dur="1" fill="hold">
+                                          <p:stCondLst>
+                                            <p:cond delay="0"/>
+                                          </p:stCondLst>
+                                        </p:cTn>
+                                        <p:tgtEl>
+                                          <p:spTgt spid="2">
+                                            <p:txEl>
+                                              <p:pRg st="7" end="7"/>
+                                            </p:txEl>
+                                          </p:spTgt>
+                                        </p:tgtEl>
+                                        <p:attrNameLst>
+                                          <p:attrName>style.visibility</p:attrName>
+                                        </p:attrNameLst>
+                                      </p:cBhvr>
+                                      <p:to>
+                                        <p:strVal val="visible"/>
+                                      </p:to>
+                                    </p:set>
+                                  </p:childTnLst>
+                                </p:cTn>
+                              </p:par>
+                            </p:childTnLst>
+                          </p:cTn>
+                        </p:par>
+                      </p:childTnLst>
+                    </p:cTn>
+                  </p:par>
+                  <p:par>
+                    <p:cTn id="35" fill="hold">
+                      <p:stCondLst>
+                        <p:cond delay="indefinite"/>
+                      </p:stCondLst>
+                      <p:childTnLst>
+                        <p:par>
+                          <p:cTn id="36" fill="hold">
+                            <p:stCondLst>
+                              <p:cond delay="0"/>
+                            </p:stCondLst>
+                            <p:childTnLst>
+                              <p:par>
+                                <p:cTn id="37" presetID="1" presetClass="entr" presetSubtype="0" fill="hold" grpId="0" nodeType="clickEffect">
+                                  <p:stCondLst>
+                                    <p:cond delay="0"/>
+                                  </p:stCondLst>
+                                  <p:childTnLst>
+                                    <p:set>
+                                      <p:cBhvr>
+                                        <p:cTn id="38" dur="1" fill="hold">
+                                          <p:stCondLst>
+                                            <p:cond delay="0"/>
+                                          </p:stCondLst>
+                                        </p:cTn>
+                                        <p:tgtEl>
+                                          <p:spTgt spid="2">
+                                            <p:txEl>
+                                              <p:pRg st="8" end="8"/>
+                                            </p:txEl>
+                                          </p:spTgt>
+                                        </p:tgtEl>
+                                        <p:attrNameLst>
+                                          <p:attrName>style.visibility</p:attrName>
+                                        </p:attrNameLst>
+                                      </p:cBhvr>
+                                      <p:to>
+                                        <p:strVal val="visible"/>
+                                      </p:to>
+                                    </p:set>
+                                  </p:childTnLst>
+                                </p:cTn>
+                              </p:par>
+                            </p:childTnLst>
+                          </p:cTn>
+                        </p:par>
+                      </p:childTnLst>
+                    </p:cTn>
+                  </p:par>
+                  <p:par>
+                    <p:cTn id="39" fill="hold">
+                      <p:stCondLst>
+                        <p:cond delay="indefinite"/>
+                      </p:stCondLst>
+                      <p:childTnLst>
+                        <p:par>
+                          <p:cTn id="40" fill="hold">
+                            <p:stCondLst>
+                              <p:cond delay="0"/>
+                            </p:stCondLst>
+                            <p:childTnLst>
+                              <p:par>
+                                <p:cTn id="41" presetID="1" presetClass="entr" presetSubtype="0" fill="hold" grpId="0" nodeType="clickEffect">
+                                  <p:stCondLst>
+                                    <p:cond delay="0"/>
+                                  </p:stCondLst>
+                                  <p:childTnLst>
+                                    <p:set>
+                                      <p:cBhvr>
+                                        <p:cTn id="42" dur="1" fill="hold">
+                                          <p:stCondLst>
+                                            <p:cond delay="0"/>
+                                          </p:stCondLst>
+                                        </p:cTn>
+                                        <p:tgtEl>
+                                          <p:spTgt spid="2">
+                                            <p:txEl>
+                                              <p:pRg st="9" end="9"/>
+                                            </p:txEl>
+                                          </p:spTgt>
+                                        </p:tgtEl>
+                                        <p:attrNameLst>
+                                          <p:attrName>style.visibility</p:attrName>
+                                        </p:attrNameLst>
+                                      </p:cBhvr>
+                                      <p:to>
+                                        <p:strVal val="visible"/>
+                                      </p:to>
+                                    </p:set>
+                                  </p:childTnLst>
+                                </p:cTn>
+                              </p:par>
+                            </p:childTnLst>
+                          </p:cTn>
+                        </p:par>
+                      </p:childTnLst>
+                    </p:cTn>
+                  </p:par>
+                  <p:par>
+                    <p:cTn id="43" fill="hold">
+                      <p:stCondLst>
+                        <p:cond delay="indefinite"/>
+                      </p:stCondLst>
+                      <p:childTnLst>
+                        <p:par>
+                          <p:cTn id="44" fill="hold">
+                            <p:stCondLst>
+                              <p:cond delay="0"/>
+                            </p:stCondLst>
+                            <p:childTnLst>
+                              <p:par>
+                                <p:cTn id="45" presetID="1" presetClass="entr" presetSubtype="0" fill="hold" grpId="0" nodeType="clickEffect">
+                                  <p:stCondLst>
+                                    <p:cond delay="0"/>
+                                  </p:stCondLst>
+                                  <p:childTnLst>
+                                    <p:set>
+                                      <p:cBhvr>
+                                        <p:cTn id="46" dur="1" fill="hold">
+                                          <p:stCondLst>
+                                            <p:cond delay="0"/>
+                                          </p:stCondLst>
+                                        </p:cTn>
+                                        <p:tgtEl>
+                                          <p:spTgt spid="2">
+                                            <p:txEl>
+                                              <p:pRg st="10" end="10"/>
                                             </p:txEl>
                                           </p:spTgt>
                                         </p:tgtEl>
@@ -5727,12 +6307,62 @@
           <a:chExt cx="0" cy="0"/>
         </a:xfrm>
       </p:grpSpPr>
+      <p:sp>
+        <p:nvSpPr>
+          <p:cNvPr id="3" name="TextBox 2">
+            <a:extLst>
+              <a:ext uri="{FF2B5EF4-FFF2-40B4-BE49-F238E27FC236}">
+                <a16:creationId xmlns:a16="http://schemas.microsoft.com/office/drawing/2014/main" id="{DCB57E70-AA8D-2247-7C2B-2452B8BBDD59}"/>
+              </a:ext>
+            </a:extLst>
+          </p:cNvPr>
+          <p:cNvSpPr txBox="1"/>
+          <p:nvPr/>
+        </p:nvSpPr>
+        <p:spPr>
+          <a:xfrm>
+            <a:off x="4247516" y="44173"/>
+            <a:ext cx="7944484" cy="923330"/>
+          </a:xfrm>
+          <a:prstGeom prst="rect">
+            <a:avLst/>
+          </a:prstGeom>
+          <a:noFill/>
+        </p:spPr>
+        <p:txBody>
+          <a:bodyPr wrap="none" rtlCol="0">
+            <a:spAutoFit/>
+          </a:bodyPr>
+          <a:lstStyle/>
+          <a:p>
+            <a:pPr algn="ctr">
+              <a:defRPr/>
+            </a:pPr>
+            <a:r>
+              <a:rPr lang="en-US" b="1" dirty="0">
+                <a:solidFill>
+                  <a:prstClr val="white"/>
+                </a:solidFill>
+                <a:cs typeface="Calibri" panose="020F0502020204030204" pitchFamily="34" charset="0"/>
+              </a:rPr>
+              <a:t>Intelligent Supply Chain Management Platform for Electric Vehicle Manufacturing</a:t>
+            </a:r>
+          </a:p>
+          <a:p>
+            <a:pPr algn="r"/>
+            <a:endParaRPr lang="en-US" dirty="0"/>
+          </a:p>
+          <a:p>
+            <a:endParaRPr lang="en-IN" dirty="0"/>
+          </a:p>
+        </p:txBody>
+      </p:sp>
       <p:pic>
         <p:nvPicPr>
-          <p:cNvPr id="6" name="Picture 5">
+          <p:cNvPr id="5" name="Picture 4">
             <a:extLst>
               <a:ext uri="{FF2B5EF4-FFF2-40B4-BE49-F238E27FC236}">
-                <a16:creationId xmlns:a16="http://schemas.microsoft.com/office/drawing/2014/main" id="{BAF88649-35D8-E73D-A473-6A5F5655C108}"/>
+                <a16:creationId xmlns:a16="http://schemas.microsoft.com/office/drawing/2014/main" id="{E3C8A8F3-ED21-2A77-C00A-ADDA200A0F23}"/>
               </a:ext>
             </a:extLst>
           </p:cNvPr>
@@ -5755,8 +6385,8 @@
         </p:blipFill>
         <p:spPr>
           <a:xfrm>
-            <a:off x="249676" y="381000"/>
-            <a:ext cx="11942324" cy="5971162"/>
+            <a:off x="0" y="569626"/>
+            <a:ext cx="12082072" cy="5636302"/>
           </a:xfrm>
           <a:prstGeom prst="rect">
             <a:avLst/>
@@ -5825,44 +6455,78 @@
           <a:bodyPr/>
           <a:lstStyle/>
           <a:p>
+            <a:pPr algn="just"/>
+            <a:r>
+              <a:rPr lang="en-IN" sz="2400" dirty="0"/>
+              <a:t>Problem: </a:t>
+            </a:r>
+            <a:r>
+              <a:rPr lang="en-IN" sz="2400" b="0" dirty="0"/>
+              <a:t>EV manufacturing supply chains involve numerous components, suppliers, warehouses, and procurement activities, making efficient coordination difficult.</a:t>
+            </a:r>
+          </a:p>
+          <a:p>
+            <a:pPr lvl="0" algn="just"/>
+            <a:r>
+              <a:rPr lang="en-IN" sz="2400" dirty="0"/>
+              <a:t>Key Challenges: </a:t>
+            </a:r>
+            <a:r>
+              <a:rPr lang="en-IN" sz="2400" b="0" dirty="0"/>
+              <a:t>Component shortages, excess inventory, supplier risks, procurement delays, and difficulty selecting the most suitable supplier.</a:t>
+            </a:r>
+          </a:p>
+          <a:p>
+            <a:pPr lvl="0" algn="just"/>
+            <a:r>
+              <a:rPr lang="en-IN" sz="2400" dirty="0"/>
+              <a:t>Process: </a:t>
+            </a:r>
+            <a:r>
+              <a:rPr lang="en-IN" sz="2400" b="0" dirty="0"/>
+              <a:t>Vehicle BOM[Bill of Materials] → Inventory Analysis → Supplier Evaluation → Risk Prediction → Supplier Ranking → Procurement Recommendation → Purchase Order → Tracking &amp; Inventory Update.</a:t>
+            </a:r>
+          </a:p>
+          <a:p>
+            <a:pPr lvl="0" algn="just"/>
+            <a:r>
+              <a:rPr lang="en-IN" sz="2400" dirty="0"/>
+              <a:t>Proposed Solution: </a:t>
+            </a:r>
+            <a:r>
+              <a:rPr lang="en-IN" sz="2400" b="0" dirty="0"/>
+              <a:t>An AI-driven supply chain platform integrating inventory, supplier intelligence, procurement, and purchase order management.</a:t>
+            </a:r>
+          </a:p>
+          <a:p>
+            <a:pPr lvl="0" algn="just"/>
+            <a:r>
+              <a:rPr lang="en-IN" sz="2400" dirty="0"/>
+              <a:t>AI Intelligence: </a:t>
+            </a:r>
+            <a:r>
+              <a:rPr lang="en-IN" sz="2400" b="0" dirty="0"/>
+              <a:t>Uses XGBoost for supplier risk prediction and multi-criteria analysis for supplier ranking and procurement recommendations.</a:t>
+            </a:r>
+          </a:p>
+          <a:p>
+            <a:pPr lvl="0" algn="just"/>
+            <a:r>
+              <a:rPr lang="en-IN" sz="2400" dirty="0"/>
+              <a:t>Advanced Intelligence</a:t>
+            </a:r>
+            <a:r>
+              <a:rPr lang="en-IN" sz="2400" b="0" dirty="0"/>
+              <a:t>: Uses Neo4j Knowledge Graph, Graph-RAG, and AI Agents for connected supply-chain analysis and intelligent decision support.</a:t>
+            </a:r>
+          </a:p>
+          <a:p>
             <a:pPr algn="just">
               <a:lnSpc>
                 <a:spcPct val="150000"/>
               </a:lnSpc>
             </a:pPr>
-            <a:r>
-              <a:rPr lang="en-US" b="0" dirty="0">
-                <a:latin typeface="+mn-lt"/>
-              </a:rPr>
-              <a:t>The Intelligent Supply Chain Management Platform for Electric Vehicle Manufacturing is an AI-driven solution designed to optimize end-to-end EV supply-chain operations. </a:t>
-            </a:r>
-          </a:p>
-          <a:p>
-            <a:pPr algn="just">
-              <a:lnSpc>
-                <a:spcPct val="150000"/>
-              </a:lnSpc>
-            </a:pPr>
-            <a:r>
-              <a:rPr lang="en-US" b="0" dirty="0">
-                <a:latin typeface="+mn-lt"/>
-              </a:rPr>
-              <a:t>It integrates BOM-based component planning, inventory optimization, supplier risk analysis, intelligent procurement, and order tracking.</a:t>
-            </a:r>
-          </a:p>
-          <a:p>
-            <a:pPr algn="just">
-              <a:lnSpc>
-                <a:spcPct val="150000"/>
-              </a:lnSpc>
-            </a:pPr>
-            <a:r>
-              <a:rPr lang="en-US" b="0" dirty="0">
-                <a:latin typeface="+mn-lt"/>
-              </a:rPr>
-              <a:t> By combining Machine Learning, Knowledge Graphs, Graph-RAG, and Agentic AI, the platform enables predictive decision-making, reduces supply disruptions and costs, and improves overall supply-chain efficiency and resilience.</a:t>
-            </a:r>
-            <a:endParaRPr lang="en-US" b="0" dirty="0">
+            <a:endParaRPr lang="en-US" sz="2400" b="0" dirty="0">
               <a:solidFill>
                 <a:srgbClr val="5583D1"/>
               </a:solidFill>
@@ -5885,7 +6549,7 @@
         </p:nvSpPr>
         <p:spPr>
           <a:xfrm>
-            <a:off x="255996" y="502545"/>
+            <a:off x="255996" y="334179"/>
             <a:ext cx="10624338" cy="646331"/>
           </a:xfrm>
           <a:prstGeom prst="rect">
@@ -5954,7 +6618,7 @@
         </p:nvCxnSpPr>
         <p:spPr>
           <a:xfrm>
-            <a:off x="221274" y="1191756"/>
+            <a:off x="255996" y="1001950"/>
             <a:ext cx="7305799" cy="0"/>
           </a:xfrm>
           <a:prstGeom prst="line">
@@ -5995,8 +6659,8 @@
         </p:nvSpPr>
         <p:spPr>
           <a:xfrm>
-            <a:off x="6093893" y="57036"/>
-            <a:ext cx="6098107" cy="646331"/>
+            <a:off x="4136570" y="11014"/>
+            <a:ext cx="8055430" cy="646331"/>
           </a:xfrm>
           <a:prstGeom prst="rect">
             <a:avLst/>
@@ -6009,14 +6673,17 @@
           </a:bodyPr>
           <a:lstStyle/>
           <a:p>
-            <a:pPr algn="r"/>
-            <a:r>
-              <a:rPr lang="en-US" sz="1800" b="1" i="1" dirty="0">
+            <a:pPr algn="ctr">
+              <a:defRPr/>
+            </a:pPr>
+            <a:r>
+              <a:rPr lang="en-US" b="1" dirty="0">
                 <a:solidFill>
-                  <a:srgbClr val="FFFFFF"/>
+                  <a:prstClr val="white"/>
                 </a:solidFill>
+                <a:cs typeface="Calibri" panose="020F0502020204030204" pitchFamily="34" charset="0"/>
               </a:rPr>
-              <a:t>Project Title -  Calibri body 18</a:t>
+              <a:t>Intelligent Supply Chain Management Platform for Electric Vehicle Manufacturing</a:t>
             </a:r>
           </a:p>
           <a:p>
@@ -6029,511 +6696,6 @@
     <p:extLst>
       <p:ext uri="{BB962C8B-B14F-4D97-AF65-F5344CB8AC3E}">
         <p14:creationId xmlns:p14="http://schemas.microsoft.com/office/powerpoint/2010/main" val="2088180620"/>
-      </p:ext>
-    </p:extLst>
-  </p:cSld>
-  <p:clrMapOvr>
-    <a:masterClrMapping/>
-  </p:clrMapOvr>
-  <mc:AlternateContent xmlns:mc="http://schemas.openxmlformats.org/markup-compatibility/2006" xmlns:p14="http://schemas.microsoft.com/office/powerpoint/2010/main">
-    <mc:Choice Requires="p14">
-      <p:transition spd="med" p14:dur="700">
-        <p:fade/>
-      </p:transition>
-    </mc:Choice>
-    <mc:Fallback xmlns="">
-      <p:transition spd="med">
-        <p:fade/>
-      </p:transition>
-    </mc:Fallback>
-  </mc:AlternateContent>
-  <p:timing>
-    <p:tnLst>
-      <p:par>
-        <p:cTn id="1" dur="indefinite" restart="never" nodeType="tmRoot">
-          <p:childTnLst>
-            <p:seq concurrent="1" nextAc="seek">
-              <p:cTn id="2" dur="indefinite" nodeType="mainSeq">
-                <p:childTnLst>
-                  <p:par>
-                    <p:cTn id="3" fill="hold">
-                      <p:stCondLst>
-                        <p:cond delay="indefinite"/>
-                      </p:stCondLst>
-                      <p:childTnLst>
-                        <p:par>
-                          <p:cTn id="4" fill="hold">
-                            <p:stCondLst>
-                              <p:cond delay="0"/>
-                            </p:stCondLst>
-                            <p:childTnLst>
-                              <p:par>
-                                <p:cTn id="5" presetID="1" presetClass="entr" presetSubtype="0" fill="hold" grpId="0" nodeType="clickEffect">
-                                  <p:stCondLst>
-                                    <p:cond delay="0"/>
-                                  </p:stCondLst>
-                                  <p:childTnLst>
-                                    <p:set>
-                                      <p:cBhvr>
-                                        <p:cTn id="6" dur="1" fill="hold">
-                                          <p:stCondLst>
-                                            <p:cond delay="0"/>
-                                          </p:stCondLst>
-                                        </p:cTn>
-                                        <p:tgtEl>
-                                          <p:spTgt spid="2">
-                                            <p:txEl>
-                                              <p:pRg st="0" end="0"/>
-                                            </p:txEl>
-                                          </p:spTgt>
-                                        </p:tgtEl>
-                                        <p:attrNameLst>
-                                          <p:attrName>style.visibility</p:attrName>
-                                        </p:attrNameLst>
-                                      </p:cBhvr>
-                                      <p:to>
-                                        <p:strVal val="visible"/>
-                                      </p:to>
-                                    </p:set>
-                                  </p:childTnLst>
-                                </p:cTn>
-                              </p:par>
-                            </p:childTnLst>
-                          </p:cTn>
-                        </p:par>
-                      </p:childTnLst>
-                    </p:cTn>
-                  </p:par>
-                  <p:par>
-                    <p:cTn id="7" fill="hold">
-                      <p:stCondLst>
-                        <p:cond delay="indefinite"/>
-                      </p:stCondLst>
-                      <p:childTnLst>
-                        <p:par>
-                          <p:cTn id="8" fill="hold">
-                            <p:stCondLst>
-                              <p:cond delay="0"/>
-                            </p:stCondLst>
-                            <p:childTnLst>
-                              <p:par>
-                                <p:cTn id="9" presetID="1" presetClass="entr" presetSubtype="0" fill="hold" grpId="0" nodeType="clickEffect">
-                                  <p:stCondLst>
-                                    <p:cond delay="0"/>
-                                  </p:stCondLst>
-                                  <p:childTnLst>
-                                    <p:set>
-                                      <p:cBhvr>
-                                        <p:cTn id="10" dur="1" fill="hold">
-                                          <p:stCondLst>
-                                            <p:cond delay="0"/>
-                                          </p:stCondLst>
-                                        </p:cTn>
-                                        <p:tgtEl>
-                                          <p:spTgt spid="2">
-                                            <p:txEl>
-                                              <p:pRg st="1" end="1"/>
-                                            </p:txEl>
-                                          </p:spTgt>
-                                        </p:tgtEl>
-                                        <p:attrNameLst>
-                                          <p:attrName>style.visibility</p:attrName>
-                                        </p:attrNameLst>
-                                      </p:cBhvr>
-                                      <p:to>
-                                        <p:strVal val="visible"/>
-                                      </p:to>
-                                    </p:set>
-                                  </p:childTnLst>
-                                </p:cTn>
-                              </p:par>
-                            </p:childTnLst>
-                          </p:cTn>
-                        </p:par>
-                      </p:childTnLst>
-                    </p:cTn>
-                  </p:par>
-                  <p:par>
-                    <p:cTn id="11" fill="hold">
-                      <p:stCondLst>
-                        <p:cond delay="indefinite"/>
-                      </p:stCondLst>
-                      <p:childTnLst>
-                        <p:par>
-                          <p:cTn id="12" fill="hold">
-                            <p:stCondLst>
-                              <p:cond delay="0"/>
-                            </p:stCondLst>
-                            <p:childTnLst>
-                              <p:par>
-                                <p:cTn id="13" presetID="1" presetClass="entr" presetSubtype="0" fill="hold" grpId="0" nodeType="clickEffect">
-                                  <p:stCondLst>
-                                    <p:cond delay="0"/>
-                                  </p:stCondLst>
-                                  <p:childTnLst>
-                                    <p:set>
-                                      <p:cBhvr>
-                                        <p:cTn id="14" dur="1" fill="hold">
-                                          <p:stCondLst>
-                                            <p:cond delay="0"/>
-                                          </p:stCondLst>
-                                        </p:cTn>
-                                        <p:tgtEl>
-                                          <p:spTgt spid="2">
-                                            <p:txEl>
-                                              <p:pRg st="2" end="2"/>
-                                            </p:txEl>
-                                          </p:spTgt>
-                                        </p:tgtEl>
-                                        <p:attrNameLst>
-                                          <p:attrName>style.visibility</p:attrName>
-                                        </p:attrNameLst>
-                                      </p:cBhvr>
-                                      <p:to>
-                                        <p:strVal val="visible"/>
-                                      </p:to>
-                                    </p:set>
-                                  </p:childTnLst>
-                                </p:cTn>
-                              </p:par>
-                            </p:childTnLst>
-                          </p:cTn>
-                        </p:par>
-                      </p:childTnLst>
-                    </p:cTn>
-                  </p:par>
-                </p:childTnLst>
-              </p:cTn>
-              <p:prevCondLst>
-                <p:cond evt="onPrev" delay="0">
-                  <p:tgtEl>
-                    <p:sldTgt/>
-                  </p:tgtEl>
-                </p:cond>
-              </p:prevCondLst>
-              <p:nextCondLst>
-                <p:cond evt="onNext" delay="0">
-                  <p:tgtEl>
-                    <p:sldTgt/>
-                  </p:tgtEl>
-                </p:cond>
-              </p:nextCondLst>
-            </p:seq>
-          </p:childTnLst>
-        </p:cTn>
-      </p:par>
-    </p:tnLst>
-    <p:bldLst>
-      <p:bldP spid="2" grpId="0" uiExpand="1" build="p"/>
-    </p:bldLst>
-  </p:timing>
-</p:sld>
-</file>
-
-<file path=ppt/slides/slide3.xml><?xml version="1.0" encoding="utf-8"?>
-<p:sld xmlns:a="http://schemas.openxmlformats.org/drawingml/2006/main" xmlns:r="http://schemas.openxmlformats.org/officeDocument/2006/relationships" xmlns:p="http://schemas.openxmlformats.org/presentationml/2006/main">
-  <p:cSld>
-    <p:spTree>
-      <p:nvGrpSpPr>
-        <p:cNvPr id="1" name="">
-          <a:extLst>
-            <a:ext uri="{FF2B5EF4-FFF2-40B4-BE49-F238E27FC236}">
-              <a16:creationId xmlns:a16="http://schemas.microsoft.com/office/drawing/2014/main" id="{86D1235D-73A1-0B84-0745-6B97432CB074}"/>
-            </a:ext>
-          </a:extLst>
-        </p:cNvPr>
-        <p:cNvGrpSpPr/>
-        <p:nvPr/>
-      </p:nvGrpSpPr>
-      <p:grpSpPr>
-        <a:xfrm>
-          <a:off x="0" y="0"/>
-          <a:ext cx="0" cy="0"/>
-          <a:chOff x="0" y="0"/>
-          <a:chExt cx="0" cy="0"/>
-        </a:xfrm>
-      </p:grpSpPr>
-      <p:sp>
-        <p:nvSpPr>
-          <p:cNvPr id="2" name="Text Placeholder 1">
-            <a:extLst>
-              <a:ext uri="{FF2B5EF4-FFF2-40B4-BE49-F238E27FC236}">
-                <a16:creationId xmlns:a16="http://schemas.microsoft.com/office/drawing/2014/main" id="{44D551BF-43EB-C049-6D3B-4D17D5775294}"/>
-              </a:ext>
-            </a:extLst>
-          </p:cNvPr>
-          <p:cNvSpPr>
-            <a:spLocks noGrp="1"/>
-          </p:cNvSpPr>
-          <p:nvPr>
-            <p:ph type="body" sz="quarter" idx="13"/>
-          </p:nvPr>
-        </p:nvSpPr>
-        <p:spPr>
-          <a:xfrm>
-            <a:off x="45230" y="1114947"/>
-            <a:ext cx="12146770" cy="4142989"/>
-          </a:xfrm>
-        </p:spPr>
-        <p:txBody>
-          <a:bodyPr/>
-          <a:lstStyle/>
-          <a:p>
-            <a:pPr algn="just">
-              <a:lnSpc>
-                <a:spcPct val="150000"/>
-              </a:lnSpc>
-            </a:pPr>
-            <a:r>
-              <a:rPr lang="en-US" b="0" dirty="0">
-                <a:solidFill>
-                  <a:srgbClr val="5583D1"/>
-                </a:solidFill>
-                <a:latin typeface="+mn-lt"/>
-              </a:rPr>
-              <a:t>Optimize inventory and component availability.</a:t>
-            </a:r>
-          </a:p>
-          <a:p>
-            <a:pPr algn="just">
-              <a:lnSpc>
-                <a:spcPct val="150000"/>
-              </a:lnSpc>
-            </a:pPr>
-            <a:r>
-              <a:rPr lang="en-US" b="0" dirty="0">
-                <a:solidFill>
-                  <a:srgbClr val="5583D1"/>
-                </a:solidFill>
-                <a:latin typeface="+mn-lt"/>
-              </a:rPr>
-              <a:t>Predict supplier risks and disruptions using AI/ML.</a:t>
-            </a:r>
-          </a:p>
-          <a:p>
-            <a:pPr algn="just">
-              <a:lnSpc>
-                <a:spcPct val="150000"/>
-              </a:lnSpc>
-            </a:pPr>
-            <a:r>
-              <a:rPr lang="en-US" b="0" dirty="0">
-                <a:solidFill>
-                  <a:srgbClr val="5583D1"/>
-                </a:solidFill>
-                <a:latin typeface="+mn-lt"/>
-              </a:rPr>
-              <a:t>Recommend the best suppliers and procurement decisions.</a:t>
-            </a:r>
-          </a:p>
-          <a:p>
-            <a:pPr algn="just">
-              <a:lnSpc>
-                <a:spcPct val="150000"/>
-              </a:lnSpc>
-            </a:pPr>
-            <a:r>
-              <a:rPr lang="en-US" b="0" dirty="0">
-                <a:solidFill>
-                  <a:srgbClr val="5583D1"/>
-                </a:solidFill>
-                <a:latin typeface="+mn-lt"/>
-              </a:rPr>
-              <a:t>Improve purchase-order and supply-chain tracking.</a:t>
-            </a:r>
-          </a:p>
-          <a:p>
-            <a:pPr algn="just">
-              <a:lnSpc>
-                <a:spcPct val="150000"/>
-              </a:lnSpc>
-            </a:pPr>
-            <a:r>
-              <a:rPr lang="en-US" b="0" dirty="0">
-                <a:solidFill>
-                  <a:srgbClr val="5583D1"/>
-                </a:solidFill>
-                <a:latin typeface="+mn-lt"/>
-              </a:rPr>
-              <a:t>Use Knowledge Graph, Graph-RAG, and AI agents for intelligent decision support.</a:t>
-            </a:r>
-          </a:p>
-          <a:p>
-            <a:pPr algn="just">
-              <a:lnSpc>
-                <a:spcPct val="150000"/>
-              </a:lnSpc>
-            </a:pPr>
-            <a:r>
-              <a:rPr lang="en-US" b="0" dirty="0">
-                <a:solidFill>
-                  <a:srgbClr val="5583D1"/>
-                </a:solidFill>
-                <a:latin typeface="+mn-lt"/>
-              </a:rPr>
-              <a:t>Reduce shortages, delays, risks, and operational costs.</a:t>
-            </a:r>
-          </a:p>
-        </p:txBody>
-      </p:sp>
-      <p:sp>
-        <p:nvSpPr>
-          <p:cNvPr id="3" name="TextBox 2">
-            <a:extLst>
-              <a:ext uri="{FF2B5EF4-FFF2-40B4-BE49-F238E27FC236}">
-                <a16:creationId xmlns:a16="http://schemas.microsoft.com/office/drawing/2014/main" id="{72FF40D3-B05A-88C3-591F-882A93FC9918}"/>
-              </a:ext>
-            </a:extLst>
-          </p:cNvPr>
-          <p:cNvSpPr txBox="1"/>
-          <p:nvPr/>
-        </p:nvSpPr>
-        <p:spPr>
-          <a:xfrm>
-            <a:off x="255996" y="502545"/>
-            <a:ext cx="10624338" cy="646331"/>
-          </a:xfrm>
-          <a:prstGeom prst="rect">
-            <a:avLst/>
-          </a:prstGeom>
-          <a:noFill/>
-        </p:spPr>
-        <p:txBody>
-          <a:bodyPr wrap="square" rtlCol="0">
-            <a:spAutoFit/>
-          </a:bodyPr>
-          <a:lstStyle/>
-          <a:p>
-            <a:pPr marL="0" marR="0" lvl="0" indent="0" algn="l" defTabSz="914400" rtl="0" eaLnBrk="1" fontAlgn="auto" latinLnBrk="0" hangingPunct="1">
-              <a:lnSpc>
-                <a:spcPct val="100000"/>
-              </a:lnSpc>
-              <a:spcBef>
-                <a:spcPts val="0"/>
-              </a:spcBef>
-              <a:spcAft>
-                <a:spcPts val="0"/>
-              </a:spcAft>
-              <a:buClrTx/>
-              <a:buSzTx/>
-              <a:buFontTx/>
-              <a:buNone/>
-              <a:tabLst/>
-              <a:defRPr/>
-            </a:pPr>
-            <a:r>
-              <a:rPr kumimoji="0" lang="en-US" sz="3600" b="1" i="0" u="none" strike="noStrike" kern="1200" cap="none" spc="0" normalizeH="0" baseline="0" noProof="0" dirty="0">
-                <a:ln>
-                  <a:noFill/>
-                </a:ln>
-                <a:solidFill>
-                  <a:srgbClr val="5B9BD5">
-                    <a:lumMod val="50000"/>
-                  </a:srgbClr>
-                </a:solidFill>
-                <a:effectLst/>
-                <a:uLnTx/>
-                <a:uFillTx/>
-                <a:latin typeface="Calibri" panose="020F0502020204030204"/>
-                <a:ea typeface="+mn-ea"/>
-                <a:cs typeface="+mn-cs"/>
-              </a:rPr>
-              <a:t>Objective…. </a:t>
-            </a:r>
-          </a:p>
-        </p:txBody>
-      </p:sp>
-      <p:cxnSp>
-        <p:nvCxnSpPr>
-          <p:cNvPr id="5" name="Straight Connector 4">
-            <a:extLst>
-              <a:ext uri="{FF2B5EF4-FFF2-40B4-BE49-F238E27FC236}">
-                <a16:creationId xmlns:a16="http://schemas.microsoft.com/office/drawing/2014/main" id="{12740D4D-2363-70E1-0E6E-1BDDA8C33C87}"/>
-              </a:ext>
-            </a:extLst>
-          </p:cNvPr>
-          <p:cNvCxnSpPr>
-            <a:cxnSpLocks/>
-          </p:cNvCxnSpPr>
-          <p:nvPr/>
-        </p:nvCxnSpPr>
-        <p:spPr>
-          <a:xfrm>
-            <a:off x="221274" y="1191756"/>
-            <a:ext cx="7305799" cy="0"/>
-          </a:xfrm>
-          <a:prstGeom prst="line">
-            <a:avLst/>
-          </a:prstGeom>
-          <a:ln w="28575">
-            <a:solidFill>
-              <a:schemeClr val="accent6"/>
-            </a:solidFill>
-          </a:ln>
-        </p:spPr>
-        <p:style>
-          <a:lnRef idx="1">
-            <a:schemeClr val="accent1"/>
-          </a:lnRef>
-          <a:fillRef idx="0">
-            <a:schemeClr val="accent1"/>
-          </a:fillRef>
-          <a:effectRef idx="0">
-            <a:schemeClr val="accent1"/>
-          </a:effectRef>
-          <a:fontRef idx="minor">
-            <a:schemeClr val="tx1"/>
-          </a:fontRef>
-        </p:style>
-      </p:cxnSp>
-      <p:sp>
-        <p:nvSpPr>
-          <p:cNvPr id="4" name="TextBox 3">
-            <a:extLst>
-              <a:ext uri="{FF2B5EF4-FFF2-40B4-BE49-F238E27FC236}">
-                <a16:creationId xmlns:a16="http://schemas.microsoft.com/office/drawing/2014/main" id="{E4452DD5-D934-4955-F39B-2109AC72692F}"/>
-              </a:ext>
-            </a:extLst>
-          </p:cNvPr>
-          <p:cNvSpPr txBox="1"/>
-          <p:nvPr/>
-        </p:nvSpPr>
-        <p:spPr>
-          <a:xfrm>
-            <a:off x="6093893" y="57036"/>
-            <a:ext cx="6098107" cy="646331"/>
-          </a:xfrm>
-          <a:prstGeom prst="rect">
-            <a:avLst/>
-          </a:prstGeom>
-          <a:noFill/>
-        </p:spPr>
-        <p:txBody>
-          <a:bodyPr wrap="square" rtlCol="0">
-            <a:spAutoFit/>
-          </a:bodyPr>
-          <a:lstStyle/>
-          <a:p>
-            <a:pPr algn="r"/>
-            <a:r>
-              <a:rPr lang="en-US" sz="1800" b="1" i="1" dirty="0">
-                <a:solidFill>
-                  <a:srgbClr val="FFFFFF"/>
-                </a:solidFill>
-              </a:rPr>
-              <a:t>Project Title -  Calibri body 18</a:t>
-            </a:r>
-          </a:p>
-          <a:p>
-            <a:pPr algn="r"/>
-            <a:endParaRPr lang="en-US" dirty="0"/>
-          </a:p>
-        </p:txBody>
-      </p:sp>
-    </p:spTree>
-    <p:extLst>
-      <p:ext uri="{BB962C8B-B14F-4D97-AF65-F5344CB8AC3E}">
-        <p14:creationId xmlns:p14="http://schemas.microsoft.com/office/powerpoint/2010/main" val="1739450533"/>
       </p:ext>
     </p:extLst>
   </p:cSld>
@@ -6882,6 +7044,744 @@
 </p:sld>
 </file>
 
+<file path=ppt/slides/slide3.xml><?xml version="1.0" encoding="utf-8"?>
+<p:sld xmlns:a="http://schemas.openxmlformats.org/drawingml/2006/main" xmlns:r="http://schemas.openxmlformats.org/officeDocument/2006/relationships" xmlns:p="http://schemas.openxmlformats.org/presentationml/2006/main">
+  <p:cSld>
+    <p:spTree>
+      <p:nvGrpSpPr>
+        <p:cNvPr id="1" name="">
+          <a:extLst>
+            <a:ext uri="{FF2B5EF4-FFF2-40B4-BE49-F238E27FC236}">
+              <a16:creationId xmlns:a16="http://schemas.microsoft.com/office/drawing/2014/main" id="{86D1235D-73A1-0B84-0745-6B97432CB074}"/>
+            </a:ext>
+          </a:extLst>
+        </p:cNvPr>
+        <p:cNvGrpSpPr/>
+        <p:nvPr/>
+      </p:nvGrpSpPr>
+      <p:grpSpPr>
+        <a:xfrm>
+          <a:off x="0" y="0"/>
+          <a:ext cx="0" cy="0"/>
+          <a:chOff x="0" y="0"/>
+          <a:chExt cx="0" cy="0"/>
+        </a:xfrm>
+      </p:grpSpPr>
+      <p:sp>
+        <p:nvSpPr>
+          <p:cNvPr id="2" name="Text Placeholder 1">
+            <a:extLst>
+              <a:ext uri="{FF2B5EF4-FFF2-40B4-BE49-F238E27FC236}">
+                <a16:creationId xmlns:a16="http://schemas.microsoft.com/office/drawing/2014/main" id="{44D551BF-43EB-C049-6D3B-4D17D5775294}"/>
+              </a:ext>
+            </a:extLst>
+          </p:cNvPr>
+          <p:cNvSpPr>
+            <a:spLocks noGrp="1"/>
+          </p:cNvSpPr>
+          <p:nvPr>
+            <p:ph type="body" sz="quarter" idx="13"/>
+          </p:nvPr>
+        </p:nvSpPr>
+        <p:spPr>
+          <a:xfrm>
+            <a:off x="45230" y="1249085"/>
+            <a:ext cx="12146770" cy="4142989"/>
+          </a:xfrm>
+        </p:spPr>
+        <p:txBody>
+          <a:bodyPr/>
+          <a:lstStyle/>
+          <a:p>
+            <a:pPr lvl="0" algn="just"/>
+            <a:r>
+              <a:rPr lang="en-IN" sz="2400" b="0" dirty="0"/>
+              <a:t>Develop an AI-driven supply chain management platform for EV manufacturing. </a:t>
+            </a:r>
+          </a:p>
+          <a:p>
+            <a:pPr lvl="0" algn="just"/>
+            <a:r>
+              <a:rPr lang="en-IN" sz="2400" b="0" dirty="0"/>
+              <a:t>Optimize inventory planning using vehicle BOM[Bill of Materials], stock levels, safety stock, and component requirements. </a:t>
+            </a:r>
+          </a:p>
+          <a:p>
+            <a:pPr lvl="0" algn="just"/>
+            <a:r>
+              <a:rPr lang="en-IN" sz="2400" b="0" dirty="0"/>
+              <a:t>Analyse supplier performance, reliability, quality, capacity, and availability. </a:t>
+            </a:r>
+          </a:p>
+          <a:p>
+            <a:pPr lvl="0" algn="just"/>
+            <a:r>
+              <a:rPr lang="en-IN" sz="2400" b="0" dirty="0"/>
+              <a:t>Predict supplier risk using XGBoost to support proactive risk management. </a:t>
+            </a:r>
+          </a:p>
+          <a:p>
+            <a:pPr lvl="0" algn="just"/>
+            <a:r>
+              <a:rPr lang="en-IN" sz="2400" b="0" dirty="0"/>
+              <a:t>Provide intelligent supplier ranking and procurement recommendations based on multiple decision factors. </a:t>
+            </a:r>
+          </a:p>
+          <a:p>
+            <a:pPr lvl="0" algn="just"/>
+            <a:r>
+              <a:rPr lang="en-IN" sz="2400" b="0" dirty="0"/>
+              <a:t>Automate and track purchase orders from creation to material receipt and inventory update. </a:t>
+            </a:r>
+          </a:p>
+          <a:p>
+            <a:pPr lvl="0" algn="just"/>
+            <a:r>
+              <a:rPr lang="en-IN" sz="2400" b="0" dirty="0"/>
+              <a:t>Build a Neo4j Knowledge Graph and Graph-RAG for connected supply-chain knowledge and context-aware querying. </a:t>
+            </a:r>
+          </a:p>
+          <a:p>
+            <a:pPr lvl="0" algn="just"/>
+            <a:r>
+              <a:rPr lang="en-IN" sz="2400" b="0" dirty="0"/>
+              <a:t>Implement AI agents for coordinated inventory, supplier, procurement, and risk decision support.</a:t>
+            </a:r>
+          </a:p>
+          <a:p>
+            <a:pPr algn="just">
+              <a:lnSpc>
+                <a:spcPct val="150000"/>
+              </a:lnSpc>
+            </a:pPr>
+            <a:endParaRPr lang="en-US" b="0" dirty="0">
+              <a:solidFill>
+                <a:srgbClr val="5583D1"/>
+              </a:solidFill>
+              <a:latin typeface="+mn-lt"/>
+            </a:endParaRPr>
+          </a:p>
+        </p:txBody>
+      </p:sp>
+      <p:sp>
+        <p:nvSpPr>
+          <p:cNvPr id="3" name="TextBox 2">
+            <a:extLst>
+              <a:ext uri="{FF2B5EF4-FFF2-40B4-BE49-F238E27FC236}">
+                <a16:creationId xmlns:a16="http://schemas.microsoft.com/office/drawing/2014/main" id="{72FF40D3-B05A-88C3-591F-882A93FC9918}"/>
+              </a:ext>
+            </a:extLst>
+          </p:cNvPr>
+          <p:cNvSpPr txBox="1"/>
+          <p:nvPr/>
+        </p:nvSpPr>
+        <p:spPr>
+          <a:xfrm>
+            <a:off x="255996" y="502545"/>
+            <a:ext cx="10624338" cy="646331"/>
+          </a:xfrm>
+          <a:prstGeom prst="rect">
+            <a:avLst/>
+          </a:prstGeom>
+          <a:noFill/>
+        </p:spPr>
+        <p:txBody>
+          <a:bodyPr wrap="square" rtlCol="0">
+            <a:spAutoFit/>
+          </a:bodyPr>
+          <a:lstStyle/>
+          <a:p>
+            <a:pPr marL="0" marR="0" lvl="0" indent="0" algn="l" defTabSz="914400" rtl="0" eaLnBrk="1" fontAlgn="auto" latinLnBrk="0" hangingPunct="1">
+              <a:lnSpc>
+                <a:spcPct val="100000"/>
+              </a:lnSpc>
+              <a:spcBef>
+                <a:spcPts val="0"/>
+              </a:spcBef>
+              <a:spcAft>
+                <a:spcPts val="0"/>
+              </a:spcAft>
+              <a:buClrTx/>
+              <a:buSzTx/>
+              <a:buFontTx/>
+              <a:buNone/>
+              <a:tabLst/>
+              <a:defRPr/>
+            </a:pPr>
+            <a:r>
+              <a:rPr kumimoji="0" lang="en-US" sz="3600" b="1" i="0" u="none" strike="noStrike" kern="1200" cap="none" spc="0" normalizeH="0" baseline="0" noProof="0" dirty="0">
+                <a:ln>
+                  <a:noFill/>
+                </a:ln>
+                <a:solidFill>
+                  <a:srgbClr val="5B9BD5">
+                    <a:lumMod val="50000"/>
+                  </a:srgbClr>
+                </a:solidFill>
+                <a:effectLst/>
+                <a:uLnTx/>
+                <a:uFillTx/>
+                <a:latin typeface="Calibri" panose="020F0502020204030204"/>
+                <a:ea typeface="+mn-ea"/>
+                <a:cs typeface="+mn-cs"/>
+              </a:rPr>
+              <a:t>Objective…. </a:t>
+            </a:r>
+          </a:p>
+        </p:txBody>
+      </p:sp>
+      <p:cxnSp>
+        <p:nvCxnSpPr>
+          <p:cNvPr id="5" name="Straight Connector 4">
+            <a:extLst>
+              <a:ext uri="{FF2B5EF4-FFF2-40B4-BE49-F238E27FC236}">
+                <a16:creationId xmlns:a16="http://schemas.microsoft.com/office/drawing/2014/main" id="{12740D4D-2363-70E1-0E6E-1BDDA8C33C87}"/>
+              </a:ext>
+            </a:extLst>
+          </p:cNvPr>
+          <p:cNvCxnSpPr>
+            <a:cxnSpLocks/>
+          </p:cNvCxnSpPr>
+          <p:nvPr/>
+        </p:nvCxnSpPr>
+        <p:spPr>
+          <a:xfrm>
+            <a:off x="221274" y="1191756"/>
+            <a:ext cx="7305799" cy="0"/>
+          </a:xfrm>
+          <a:prstGeom prst="line">
+            <a:avLst/>
+          </a:prstGeom>
+          <a:ln w="28575">
+            <a:solidFill>
+              <a:schemeClr val="accent6"/>
+            </a:solidFill>
+          </a:ln>
+        </p:spPr>
+        <p:style>
+          <a:lnRef idx="1">
+            <a:schemeClr val="accent1"/>
+          </a:lnRef>
+          <a:fillRef idx="0">
+            <a:schemeClr val="accent1"/>
+          </a:fillRef>
+          <a:effectRef idx="0">
+            <a:schemeClr val="accent1"/>
+          </a:effectRef>
+          <a:fontRef idx="minor">
+            <a:schemeClr val="tx1"/>
+          </a:fontRef>
+        </p:style>
+      </p:cxnSp>
+      <p:sp>
+        <p:nvSpPr>
+          <p:cNvPr id="4" name="TextBox 3">
+            <a:extLst>
+              <a:ext uri="{FF2B5EF4-FFF2-40B4-BE49-F238E27FC236}">
+                <a16:creationId xmlns:a16="http://schemas.microsoft.com/office/drawing/2014/main" id="{E4452DD5-D934-4955-F39B-2109AC72692F}"/>
+              </a:ext>
+            </a:extLst>
+          </p:cNvPr>
+          <p:cNvSpPr txBox="1"/>
+          <p:nvPr/>
+        </p:nvSpPr>
+        <p:spPr>
+          <a:xfrm>
+            <a:off x="3740442" y="0"/>
+            <a:ext cx="8884929" cy="1200329"/>
+          </a:xfrm>
+          <a:prstGeom prst="rect">
+            <a:avLst/>
+          </a:prstGeom>
+          <a:noFill/>
+        </p:spPr>
+        <p:txBody>
+          <a:bodyPr wrap="square" rtlCol="0">
+            <a:spAutoFit/>
+          </a:bodyPr>
+          <a:lstStyle/>
+          <a:p>
+            <a:pPr algn="ctr">
+              <a:defRPr/>
+            </a:pPr>
+            <a:r>
+              <a:rPr lang="en-US" b="1" dirty="0">
+                <a:solidFill>
+                  <a:prstClr val="white"/>
+                </a:solidFill>
+                <a:cs typeface="Calibri" panose="020F0502020204030204" pitchFamily="34" charset="0"/>
+              </a:rPr>
+              <a:t>Intelligent Supply Chain Management Platform for Electric Vehicle Manufacturing</a:t>
+            </a:r>
+          </a:p>
+          <a:p>
+            <a:pPr algn="r"/>
+            <a:endParaRPr lang="en-US" dirty="0"/>
+          </a:p>
+          <a:p>
+            <a:pPr algn="r"/>
+            <a:endParaRPr lang="en-US" sz="1800" b="1" i="1" dirty="0">
+              <a:solidFill>
+                <a:srgbClr val="FFFFFF"/>
+              </a:solidFill>
+            </a:endParaRPr>
+          </a:p>
+          <a:p>
+            <a:pPr algn="r"/>
+            <a:endParaRPr lang="en-US" dirty="0"/>
+          </a:p>
+        </p:txBody>
+      </p:sp>
+    </p:spTree>
+    <p:extLst>
+      <p:ext uri="{BB962C8B-B14F-4D97-AF65-F5344CB8AC3E}">
+        <p14:creationId xmlns:p14="http://schemas.microsoft.com/office/powerpoint/2010/main" val="1739450533"/>
+      </p:ext>
+    </p:extLst>
+  </p:cSld>
+  <p:clrMapOvr>
+    <a:masterClrMapping/>
+  </p:clrMapOvr>
+  <mc:AlternateContent xmlns:mc="http://schemas.openxmlformats.org/markup-compatibility/2006" xmlns:p14="http://schemas.microsoft.com/office/powerpoint/2010/main">
+    <mc:Choice Requires="p14">
+      <p:transition spd="med" p14:dur="700">
+        <p:fade/>
+      </p:transition>
+    </mc:Choice>
+    <mc:Fallback xmlns="">
+      <p:transition spd="med">
+        <p:fade/>
+      </p:transition>
+    </mc:Fallback>
+  </mc:AlternateContent>
+  <p:timing>
+    <p:tnLst>
+      <p:par>
+        <p:cTn id="1" dur="indefinite" restart="never" nodeType="tmRoot">
+          <p:childTnLst>
+            <p:seq concurrent="1" nextAc="seek">
+              <p:cTn id="2" dur="indefinite" nodeType="mainSeq">
+                <p:childTnLst>
+                  <p:par>
+                    <p:cTn id="3" fill="hold">
+                      <p:stCondLst>
+                        <p:cond delay="indefinite"/>
+                      </p:stCondLst>
+                      <p:childTnLst>
+                        <p:par>
+                          <p:cTn id="4" fill="hold">
+                            <p:stCondLst>
+                              <p:cond delay="0"/>
+                            </p:stCondLst>
+                            <p:childTnLst>
+                              <p:par>
+                                <p:cTn id="5" presetID="1" presetClass="entr" presetSubtype="0" fill="hold" grpId="0" nodeType="clickEffect">
+                                  <p:stCondLst>
+                                    <p:cond delay="0"/>
+                                  </p:stCondLst>
+                                  <p:childTnLst>
+                                    <p:set>
+                                      <p:cBhvr>
+                                        <p:cTn id="6" dur="1" fill="hold">
+                                          <p:stCondLst>
+                                            <p:cond delay="0"/>
+                                          </p:stCondLst>
+                                        </p:cTn>
+                                        <p:tgtEl>
+                                          <p:spTgt spid="2">
+                                            <p:txEl>
+                                              <p:pRg st="0" end="0"/>
+                                            </p:txEl>
+                                          </p:spTgt>
+                                        </p:tgtEl>
+                                        <p:attrNameLst>
+                                          <p:attrName>style.visibility</p:attrName>
+                                        </p:attrNameLst>
+                                      </p:cBhvr>
+                                      <p:to>
+                                        <p:strVal val="visible"/>
+                                      </p:to>
+                                    </p:set>
+                                  </p:childTnLst>
+                                </p:cTn>
+                              </p:par>
+                            </p:childTnLst>
+                          </p:cTn>
+                        </p:par>
+                      </p:childTnLst>
+                    </p:cTn>
+                  </p:par>
+                  <p:par>
+                    <p:cTn id="7" fill="hold">
+                      <p:stCondLst>
+                        <p:cond delay="indefinite"/>
+                      </p:stCondLst>
+                      <p:childTnLst>
+                        <p:par>
+                          <p:cTn id="8" fill="hold">
+                            <p:stCondLst>
+                              <p:cond delay="0"/>
+                            </p:stCondLst>
+                            <p:childTnLst>
+                              <p:par>
+                                <p:cTn id="9" presetID="1" presetClass="entr" presetSubtype="0" fill="hold" grpId="0" nodeType="clickEffect">
+                                  <p:stCondLst>
+                                    <p:cond delay="0"/>
+                                  </p:stCondLst>
+                                  <p:childTnLst>
+                                    <p:set>
+                                      <p:cBhvr>
+                                        <p:cTn id="10" dur="1" fill="hold">
+                                          <p:stCondLst>
+                                            <p:cond delay="0"/>
+                                          </p:stCondLst>
+                                        </p:cTn>
+                                        <p:tgtEl>
+                                          <p:spTgt spid="2">
+                                            <p:txEl>
+                                              <p:pRg st="1" end="1"/>
+                                            </p:txEl>
+                                          </p:spTgt>
+                                        </p:tgtEl>
+                                        <p:attrNameLst>
+                                          <p:attrName>style.visibility</p:attrName>
+                                        </p:attrNameLst>
+                                      </p:cBhvr>
+                                      <p:to>
+                                        <p:strVal val="visible"/>
+                                      </p:to>
+                                    </p:set>
+                                  </p:childTnLst>
+                                </p:cTn>
+                              </p:par>
+                            </p:childTnLst>
+                          </p:cTn>
+                        </p:par>
+                      </p:childTnLst>
+                    </p:cTn>
+                  </p:par>
+                  <p:par>
+                    <p:cTn id="11" fill="hold">
+                      <p:stCondLst>
+                        <p:cond delay="indefinite"/>
+                      </p:stCondLst>
+                      <p:childTnLst>
+                        <p:par>
+                          <p:cTn id="12" fill="hold">
+                            <p:stCondLst>
+                              <p:cond delay="0"/>
+                            </p:stCondLst>
+                            <p:childTnLst>
+                              <p:par>
+                                <p:cTn id="13" presetID="1" presetClass="entr" presetSubtype="0" fill="hold" grpId="0" nodeType="clickEffect">
+                                  <p:stCondLst>
+                                    <p:cond delay="0"/>
+                                  </p:stCondLst>
+                                  <p:childTnLst>
+                                    <p:set>
+                                      <p:cBhvr>
+                                        <p:cTn id="14" dur="1" fill="hold">
+                                          <p:stCondLst>
+                                            <p:cond delay="0"/>
+                                          </p:stCondLst>
+                                        </p:cTn>
+                                        <p:tgtEl>
+                                          <p:spTgt spid="2">
+                                            <p:txEl>
+                                              <p:pRg st="2" end="2"/>
+                                            </p:txEl>
+                                          </p:spTgt>
+                                        </p:tgtEl>
+                                        <p:attrNameLst>
+                                          <p:attrName>style.visibility</p:attrName>
+                                        </p:attrNameLst>
+                                      </p:cBhvr>
+                                      <p:to>
+                                        <p:strVal val="visible"/>
+                                      </p:to>
+                                    </p:set>
+                                  </p:childTnLst>
+                                </p:cTn>
+                              </p:par>
+                            </p:childTnLst>
+                          </p:cTn>
+                        </p:par>
+                      </p:childTnLst>
+                    </p:cTn>
+                  </p:par>
+                  <p:par>
+                    <p:cTn id="15" fill="hold">
+                      <p:stCondLst>
+                        <p:cond delay="indefinite"/>
+                      </p:stCondLst>
+                      <p:childTnLst>
+                        <p:par>
+                          <p:cTn id="16" fill="hold">
+                            <p:stCondLst>
+                              <p:cond delay="0"/>
+                            </p:stCondLst>
+                            <p:childTnLst>
+                              <p:par>
+                                <p:cTn id="17" presetID="1" presetClass="entr" presetSubtype="0" fill="hold" grpId="0" nodeType="clickEffect">
+                                  <p:stCondLst>
+                                    <p:cond delay="0"/>
+                                  </p:stCondLst>
+                                  <p:childTnLst>
+                                    <p:set>
+                                      <p:cBhvr>
+                                        <p:cTn id="18" dur="1" fill="hold">
+                                          <p:stCondLst>
+                                            <p:cond delay="0"/>
+                                          </p:stCondLst>
+                                        </p:cTn>
+                                        <p:tgtEl>
+                                          <p:spTgt spid="2">
+                                            <p:txEl>
+                                              <p:pRg st="3" end="3"/>
+                                            </p:txEl>
+                                          </p:spTgt>
+                                        </p:tgtEl>
+                                        <p:attrNameLst>
+                                          <p:attrName>style.visibility</p:attrName>
+                                        </p:attrNameLst>
+                                      </p:cBhvr>
+                                      <p:to>
+                                        <p:strVal val="visible"/>
+                                      </p:to>
+                                    </p:set>
+                                  </p:childTnLst>
+                                </p:cTn>
+                              </p:par>
+                            </p:childTnLst>
+                          </p:cTn>
+                        </p:par>
+                      </p:childTnLst>
+                    </p:cTn>
+                  </p:par>
+                  <p:par>
+                    <p:cTn id="19" fill="hold">
+                      <p:stCondLst>
+                        <p:cond delay="indefinite"/>
+                      </p:stCondLst>
+                      <p:childTnLst>
+                        <p:par>
+                          <p:cTn id="20" fill="hold">
+                            <p:stCondLst>
+                              <p:cond delay="0"/>
+                            </p:stCondLst>
+                            <p:childTnLst>
+                              <p:par>
+                                <p:cTn id="21" presetID="1" presetClass="entr" presetSubtype="0" fill="hold" grpId="0" nodeType="clickEffect">
+                                  <p:stCondLst>
+                                    <p:cond delay="0"/>
+                                  </p:stCondLst>
+                                  <p:childTnLst>
+                                    <p:set>
+                                      <p:cBhvr>
+                                        <p:cTn id="22" dur="1" fill="hold">
+                                          <p:stCondLst>
+                                            <p:cond delay="0"/>
+                                          </p:stCondLst>
+                                        </p:cTn>
+                                        <p:tgtEl>
+                                          <p:spTgt spid="2">
+                                            <p:txEl>
+                                              <p:pRg st="4" end="4"/>
+                                            </p:txEl>
+                                          </p:spTgt>
+                                        </p:tgtEl>
+                                        <p:attrNameLst>
+                                          <p:attrName>style.visibility</p:attrName>
+                                        </p:attrNameLst>
+                                      </p:cBhvr>
+                                      <p:to>
+                                        <p:strVal val="visible"/>
+                                      </p:to>
+                                    </p:set>
+                                  </p:childTnLst>
+                                </p:cTn>
+                              </p:par>
+                            </p:childTnLst>
+                          </p:cTn>
+                        </p:par>
+                      </p:childTnLst>
+                    </p:cTn>
+                  </p:par>
+                  <p:par>
+                    <p:cTn id="23" fill="hold">
+                      <p:stCondLst>
+                        <p:cond delay="indefinite"/>
+                      </p:stCondLst>
+                      <p:childTnLst>
+                        <p:par>
+                          <p:cTn id="24" fill="hold">
+                            <p:stCondLst>
+                              <p:cond delay="0"/>
+                            </p:stCondLst>
+                            <p:childTnLst>
+                              <p:par>
+                                <p:cTn id="25" presetID="1" presetClass="entr" presetSubtype="0" fill="hold" grpId="0" nodeType="clickEffect">
+                                  <p:stCondLst>
+                                    <p:cond delay="0"/>
+                                  </p:stCondLst>
+                                  <p:childTnLst>
+                                    <p:set>
+                                      <p:cBhvr>
+                                        <p:cTn id="26" dur="1" fill="hold">
+                                          <p:stCondLst>
+                                            <p:cond delay="0"/>
+                                          </p:stCondLst>
+                                        </p:cTn>
+                                        <p:tgtEl>
+                                          <p:spTgt spid="2">
+                                            <p:txEl>
+                                              <p:pRg st="5" end="5"/>
+                                            </p:txEl>
+                                          </p:spTgt>
+                                        </p:tgtEl>
+                                        <p:attrNameLst>
+                                          <p:attrName>style.visibility</p:attrName>
+                                        </p:attrNameLst>
+                                      </p:cBhvr>
+                                      <p:to>
+                                        <p:strVal val="visible"/>
+                                      </p:to>
+                                    </p:set>
+                                  </p:childTnLst>
+                                </p:cTn>
+                              </p:par>
+                            </p:childTnLst>
+                          </p:cTn>
+                        </p:par>
+                      </p:childTnLst>
+                    </p:cTn>
+                  </p:par>
+                  <p:par>
+                    <p:cTn id="27" fill="hold">
+                      <p:stCondLst>
+                        <p:cond delay="indefinite"/>
+                      </p:stCondLst>
+                      <p:childTnLst>
+                        <p:par>
+                          <p:cTn id="28" fill="hold">
+                            <p:stCondLst>
+                              <p:cond delay="0"/>
+                            </p:stCondLst>
+                            <p:childTnLst>
+                              <p:par>
+                                <p:cTn id="29" presetID="1" presetClass="entr" presetSubtype="0" fill="hold" grpId="0" nodeType="clickEffect">
+                                  <p:stCondLst>
+                                    <p:cond delay="0"/>
+                                  </p:stCondLst>
+                                  <p:childTnLst>
+                                    <p:set>
+                                      <p:cBhvr>
+                                        <p:cTn id="30" dur="1" fill="hold">
+                                          <p:stCondLst>
+                                            <p:cond delay="0"/>
+                                          </p:stCondLst>
+                                        </p:cTn>
+                                        <p:tgtEl>
+                                          <p:spTgt spid="2">
+                                            <p:txEl>
+                                              <p:pRg st="6" end="6"/>
+                                            </p:txEl>
+                                          </p:spTgt>
+                                        </p:tgtEl>
+                                        <p:attrNameLst>
+                                          <p:attrName>style.visibility</p:attrName>
+                                        </p:attrNameLst>
+                                      </p:cBhvr>
+                                      <p:to>
+                                        <p:strVal val="visible"/>
+                                      </p:to>
+                                    </p:set>
+                                  </p:childTnLst>
+                                </p:cTn>
+                              </p:par>
+                            </p:childTnLst>
+                          </p:cTn>
+                        </p:par>
+                      </p:childTnLst>
+                    </p:cTn>
+                  </p:par>
+                  <p:par>
+                    <p:cTn id="31" fill="hold">
+                      <p:stCondLst>
+                        <p:cond delay="indefinite"/>
+                      </p:stCondLst>
+                      <p:childTnLst>
+                        <p:par>
+                          <p:cTn id="32" fill="hold">
+                            <p:stCondLst>
+                              <p:cond delay="0"/>
+                            </p:stCondLst>
+                            <p:childTnLst>
+                              <p:par>
+                                <p:cTn id="33" presetID="1" presetClass="entr" presetSubtype="0" fill="hold" grpId="0" nodeType="clickEffect">
+                                  <p:stCondLst>
+                                    <p:cond delay="0"/>
+                                  </p:stCondLst>
+                                  <p:childTnLst>
+                                    <p:set>
+                                      <p:cBhvr>
+                                        <p:cTn id="34" dur="1" fill="hold">
+                                          <p:stCondLst>
+                                            <p:cond delay="0"/>
+                                          </p:stCondLst>
+                                        </p:cTn>
+                                        <p:tgtEl>
+                                          <p:spTgt spid="2">
+                                            <p:txEl>
+                                              <p:pRg st="7" end="7"/>
+                                            </p:txEl>
+                                          </p:spTgt>
+                                        </p:tgtEl>
+                                        <p:attrNameLst>
+                                          <p:attrName>style.visibility</p:attrName>
+                                        </p:attrNameLst>
+                                      </p:cBhvr>
+                                      <p:to>
+                                        <p:strVal val="visible"/>
+                                      </p:to>
+                                    </p:set>
+                                  </p:childTnLst>
+                                </p:cTn>
+                              </p:par>
+                            </p:childTnLst>
+                          </p:cTn>
+                        </p:par>
+                      </p:childTnLst>
+                    </p:cTn>
+                  </p:par>
+                </p:childTnLst>
+              </p:cTn>
+              <p:prevCondLst>
+                <p:cond evt="onPrev" delay="0">
+                  <p:tgtEl>
+                    <p:sldTgt/>
+                  </p:tgtEl>
+                </p:cond>
+              </p:prevCondLst>
+              <p:nextCondLst>
+                <p:cond evt="onNext" delay="0">
+                  <p:tgtEl>
+                    <p:sldTgt/>
+                  </p:tgtEl>
+                </p:cond>
+              </p:nextCondLst>
+            </p:seq>
+          </p:childTnLst>
+        </p:cTn>
+      </p:par>
+    </p:tnLst>
+    <p:bldLst>
+      <p:bldP spid="2" grpId="0" uiExpand="1" build="p"/>
+    </p:bldLst>
+  </p:timing>
+</p:sld>
+</file>
+
 <file path=ppt/slides/slide4.xml><?xml version="1.0" encoding="utf-8"?>
 <p:sld xmlns:a="http://schemas.openxmlformats.org/drawingml/2006/main" xmlns:r="http://schemas.openxmlformats.org/officeDocument/2006/relationships" xmlns:p="http://schemas.openxmlformats.org/presentationml/2006/main">
   <p:cSld>
@@ -6931,18 +7831,54 @@
           <a:bodyPr/>
           <a:lstStyle/>
           <a:p>
+            <a:pPr lvl="0"/>
+            <a:r>
+              <a:rPr lang="en-IN" sz="2400" b="0" dirty="0"/>
+              <a:t>Manage EV component inventory and BOM[Bill of Materials]-based requirements. </a:t>
+            </a:r>
+          </a:p>
+          <a:p>
+            <a:pPr lvl="0"/>
+            <a:r>
+              <a:rPr lang="en-IN" sz="2400" b="0" dirty="0"/>
+              <a:t>Analyse supplier performance, availability, and risk. </a:t>
+            </a:r>
+          </a:p>
+          <a:p>
+            <a:pPr lvl="0"/>
+            <a:r>
+              <a:rPr lang="en-IN" sz="2400" b="0" dirty="0"/>
+              <a:t>Provide AI-based supplier ranking and procurement recommendations. </a:t>
+            </a:r>
+          </a:p>
+          <a:p>
+            <a:pPr lvl="0"/>
+            <a:r>
+              <a:rPr lang="en-IN" sz="2400" b="0" dirty="0"/>
+              <a:t>Manage and track purchase orders and inventory updates. </a:t>
+            </a:r>
+          </a:p>
+          <a:p>
+            <a:pPr lvl="0"/>
+            <a:r>
+              <a:rPr lang="en-IN" sz="2400" b="0" dirty="0"/>
+              <a:t>Use Knowledge Graph and Graph-RAG for connected supply-chain intelligence. </a:t>
+            </a:r>
+          </a:p>
+          <a:p>
+            <a:pPr lvl="0"/>
+            <a:r>
+              <a:rPr lang="en-IN" sz="2400" b="0" dirty="0"/>
+              <a:t>Use AI agents for automated analysis and decision support.</a:t>
+            </a:r>
+          </a:p>
+          <a:p>
             <a:pPr algn="just">
               <a:lnSpc>
                 <a:spcPct val="150000"/>
               </a:lnSpc>
             </a:pPr>
-            <a:r>
-              <a:rPr lang="en-US" b="0" dirty="0">
-                <a:latin typeface="+mn-lt"/>
-              </a:rPr>
-              <a:t>The platform covers the complete EV supply-chain workflow from demand forecasting and BOM-based component planning to inventory optimization, supplier evaluation, intelligent procurement, order tracking, and risk management. It further uses AI agents and Graph-RAG to provide automated insights, recommendations, alerts, and decision support.</a:t>
-            </a:r>
-            <a:endParaRPr lang="en-US" b="0" dirty="0">
+            <a:endParaRPr lang="en-US" sz="2400" b="0" dirty="0">
               <a:solidFill>
                 <a:srgbClr val="5583D1"/>
               </a:solidFill>
@@ -7075,8 +8011,8 @@
         </p:nvSpPr>
         <p:spPr>
           <a:xfrm>
-            <a:off x="6093893" y="57036"/>
-            <a:ext cx="6098107" cy="646331"/>
+            <a:off x="4886203" y="57036"/>
+            <a:ext cx="7305798" cy="1200329"/>
           </a:xfrm>
           <a:prstGeom prst="rect">
             <a:avLst/>
@@ -7089,19 +8025,30 @@
           </a:bodyPr>
           <a:lstStyle/>
           <a:p>
-            <a:pPr algn="r"/>
-            <a:r>
-              <a:rPr lang="en-US" sz="1800" b="1" i="1" dirty="0">
+            <a:pPr algn="ctr">
+              <a:defRPr/>
+            </a:pPr>
+            <a:r>
+              <a:rPr lang="en-US" b="1" dirty="0">
                 <a:solidFill>
-                  <a:srgbClr val="FFFFFF"/>
+                  <a:prstClr val="white"/>
                 </a:solidFill>
+                <a:cs typeface="Calibri" panose="020F0502020204030204" pitchFamily="34" charset="0"/>
               </a:rPr>
-              <a:t>Project Title -  Calibri body 18</a:t>
+              <a:t>Intelligent Supply Chain Management Platform for Electric Vehicle Manufacturing</a:t>
             </a:r>
           </a:p>
           <a:p>
             <a:pPr algn="r"/>
             <a:endParaRPr lang="en-US" dirty="0"/>
+          </a:p>
+          <a:p>
+            <a:pPr algn="r"/>
+            <a:endParaRPr lang="en-US" sz="1800" b="1" i="1" dirty="0">
+              <a:solidFill>
+                <a:srgbClr val="FFFFFF"/>
+              </a:solidFill>
+            </a:endParaRPr>
           </a:p>
         </p:txBody>
       </p:sp>
@@ -7164,6 +8111,251 @@
                                           <p:spTgt spid="2">
                                             <p:txEl>
                                               <p:pRg st="0" end="0"/>
+                                            </p:txEl>
+                                          </p:spTgt>
+                                        </p:tgtEl>
+                                        <p:attrNameLst>
+                                          <p:attrName>style.visibility</p:attrName>
+                                        </p:attrNameLst>
+                                      </p:cBhvr>
+                                      <p:to>
+                                        <p:strVal val="visible"/>
+                                      </p:to>
+                                    </p:set>
+                                  </p:childTnLst>
+                                </p:cTn>
+                              </p:par>
+                            </p:childTnLst>
+                          </p:cTn>
+                        </p:par>
+                      </p:childTnLst>
+                    </p:cTn>
+                  </p:par>
+                  <p:par>
+                    <p:cTn id="7" fill="hold">
+                      <p:stCondLst>
+                        <p:cond delay="indefinite"/>
+                      </p:stCondLst>
+                      <p:childTnLst>
+                        <p:par>
+                          <p:cTn id="8" fill="hold">
+                            <p:stCondLst>
+                              <p:cond delay="0"/>
+                            </p:stCondLst>
+                            <p:childTnLst>
+                              <p:par>
+                                <p:cTn id="9" presetID="1" presetClass="entr" presetSubtype="0" fill="hold" grpId="0" nodeType="clickEffect">
+                                  <p:stCondLst>
+                                    <p:cond delay="0"/>
+                                  </p:stCondLst>
+                                  <p:childTnLst>
+                                    <p:set>
+                                      <p:cBhvr>
+                                        <p:cTn id="10" dur="1" fill="hold">
+                                          <p:stCondLst>
+                                            <p:cond delay="0"/>
+                                          </p:stCondLst>
+                                        </p:cTn>
+                                        <p:tgtEl>
+                                          <p:spTgt spid="2">
+                                            <p:txEl>
+                                              <p:pRg st="1" end="1"/>
+                                            </p:txEl>
+                                          </p:spTgt>
+                                        </p:tgtEl>
+                                        <p:attrNameLst>
+                                          <p:attrName>style.visibility</p:attrName>
+                                        </p:attrNameLst>
+                                      </p:cBhvr>
+                                      <p:to>
+                                        <p:strVal val="visible"/>
+                                      </p:to>
+                                    </p:set>
+                                  </p:childTnLst>
+                                </p:cTn>
+                              </p:par>
+                            </p:childTnLst>
+                          </p:cTn>
+                        </p:par>
+                      </p:childTnLst>
+                    </p:cTn>
+                  </p:par>
+                  <p:par>
+                    <p:cTn id="11" fill="hold">
+                      <p:stCondLst>
+                        <p:cond delay="indefinite"/>
+                      </p:stCondLst>
+                      <p:childTnLst>
+                        <p:par>
+                          <p:cTn id="12" fill="hold">
+                            <p:stCondLst>
+                              <p:cond delay="0"/>
+                            </p:stCondLst>
+                            <p:childTnLst>
+                              <p:par>
+                                <p:cTn id="13" presetID="1" presetClass="entr" presetSubtype="0" fill="hold" grpId="0" nodeType="clickEffect">
+                                  <p:stCondLst>
+                                    <p:cond delay="0"/>
+                                  </p:stCondLst>
+                                  <p:childTnLst>
+                                    <p:set>
+                                      <p:cBhvr>
+                                        <p:cTn id="14" dur="1" fill="hold">
+                                          <p:stCondLst>
+                                            <p:cond delay="0"/>
+                                          </p:stCondLst>
+                                        </p:cTn>
+                                        <p:tgtEl>
+                                          <p:spTgt spid="2">
+                                            <p:txEl>
+                                              <p:pRg st="2" end="2"/>
+                                            </p:txEl>
+                                          </p:spTgt>
+                                        </p:tgtEl>
+                                        <p:attrNameLst>
+                                          <p:attrName>style.visibility</p:attrName>
+                                        </p:attrNameLst>
+                                      </p:cBhvr>
+                                      <p:to>
+                                        <p:strVal val="visible"/>
+                                      </p:to>
+                                    </p:set>
+                                  </p:childTnLst>
+                                </p:cTn>
+                              </p:par>
+                            </p:childTnLst>
+                          </p:cTn>
+                        </p:par>
+                      </p:childTnLst>
+                    </p:cTn>
+                  </p:par>
+                  <p:par>
+                    <p:cTn id="15" fill="hold">
+                      <p:stCondLst>
+                        <p:cond delay="indefinite"/>
+                      </p:stCondLst>
+                      <p:childTnLst>
+                        <p:par>
+                          <p:cTn id="16" fill="hold">
+                            <p:stCondLst>
+                              <p:cond delay="0"/>
+                            </p:stCondLst>
+                            <p:childTnLst>
+                              <p:par>
+                                <p:cTn id="17" presetID="1" presetClass="entr" presetSubtype="0" fill="hold" grpId="0" nodeType="clickEffect">
+                                  <p:stCondLst>
+                                    <p:cond delay="0"/>
+                                  </p:stCondLst>
+                                  <p:childTnLst>
+                                    <p:set>
+                                      <p:cBhvr>
+                                        <p:cTn id="18" dur="1" fill="hold">
+                                          <p:stCondLst>
+                                            <p:cond delay="0"/>
+                                          </p:stCondLst>
+                                        </p:cTn>
+                                        <p:tgtEl>
+                                          <p:spTgt spid="2">
+                                            <p:txEl>
+                                              <p:pRg st="3" end="3"/>
+                                            </p:txEl>
+                                          </p:spTgt>
+                                        </p:tgtEl>
+                                        <p:attrNameLst>
+                                          <p:attrName>style.visibility</p:attrName>
+                                        </p:attrNameLst>
+                                      </p:cBhvr>
+                                      <p:to>
+                                        <p:strVal val="visible"/>
+                                      </p:to>
+                                    </p:set>
+                                  </p:childTnLst>
+                                </p:cTn>
+                              </p:par>
+                            </p:childTnLst>
+                          </p:cTn>
+                        </p:par>
+                      </p:childTnLst>
+                    </p:cTn>
+                  </p:par>
+                  <p:par>
+                    <p:cTn id="19" fill="hold">
+                      <p:stCondLst>
+                        <p:cond delay="indefinite"/>
+                      </p:stCondLst>
+                      <p:childTnLst>
+                        <p:par>
+                          <p:cTn id="20" fill="hold">
+                            <p:stCondLst>
+                              <p:cond delay="0"/>
+                            </p:stCondLst>
+                            <p:childTnLst>
+                              <p:par>
+                                <p:cTn id="21" presetID="1" presetClass="entr" presetSubtype="0" fill="hold" grpId="0" nodeType="clickEffect">
+                                  <p:stCondLst>
+                                    <p:cond delay="0"/>
+                                  </p:stCondLst>
+                                  <p:childTnLst>
+                                    <p:set>
+                                      <p:cBhvr>
+                                        <p:cTn id="22" dur="1" fill="hold">
+                                          <p:stCondLst>
+                                            <p:cond delay="0"/>
+                                          </p:stCondLst>
+                                        </p:cTn>
+                                        <p:tgtEl>
+                                          <p:spTgt spid="2">
+                                            <p:txEl>
+                                              <p:pRg st="4" end="4"/>
+                                            </p:txEl>
+                                          </p:spTgt>
+                                        </p:tgtEl>
+                                        <p:attrNameLst>
+                                          <p:attrName>style.visibility</p:attrName>
+                                        </p:attrNameLst>
+                                      </p:cBhvr>
+                                      <p:to>
+                                        <p:strVal val="visible"/>
+                                      </p:to>
+                                    </p:set>
+                                  </p:childTnLst>
+                                </p:cTn>
+                              </p:par>
+                            </p:childTnLst>
+                          </p:cTn>
+                        </p:par>
+                      </p:childTnLst>
+                    </p:cTn>
+                  </p:par>
+                  <p:par>
+                    <p:cTn id="23" fill="hold">
+                      <p:stCondLst>
+                        <p:cond delay="indefinite"/>
+                      </p:stCondLst>
+                      <p:childTnLst>
+                        <p:par>
+                          <p:cTn id="24" fill="hold">
+                            <p:stCondLst>
+                              <p:cond delay="0"/>
+                            </p:stCondLst>
+                            <p:childTnLst>
+                              <p:par>
+                                <p:cTn id="25" presetID="1" presetClass="entr" presetSubtype="0" fill="hold" grpId="0" nodeType="clickEffect">
+                                  <p:stCondLst>
+                                    <p:cond delay="0"/>
+                                  </p:stCondLst>
+                                  <p:childTnLst>
+                                    <p:set>
+                                      <p:cBhvr>
+                                        <p:cTn id="26" dur="1" fill="hold">
+                                          <p:stCondLst>
+                                            <p:cond delay="0"/>
+                                          </p:stCondLst>
+                                        </p:cTn>
+                                        <p:tgtEl>
+                                          <p:spTgt spid="2">
+                                            <p:txEl>
+                                              <p:pRg st="5" end="5"/>
                                             </p:txEl>
                                           </p:spTgt>
                                         </p:tgtEl>
@@ -7359,8 +8551,8 @@
         </p:nvSpPr>
         <p:spPr>
           <a:xfrm>
-            <a:off x="6093893" y="57036"/>
-            <a:ext cx="6098107" cy="646331"/>
+            <a:off x="4238172" y="-9589"/>
+            <a:ext cx="8084457" cy="923330"/>
           </a:xfrm>
           <a:prstGeom prst="rect">
             <a:avLst/>
@@ -7373,15 +8565,22 @@
           </a:bodyPr>
           <a:lstStyle/>
           <a:p>
+            <a:pPr algn="ctr">
+              <a:defRPr/>
+            </a:pPr>
+            <a:r>
+              <a:rPr lang="en-US" b="1" dirty="0">
+                <a:solidFill>
+                  <a:prstClr val="white"/>
+                </a:solidFill>
+                <a:cs typeface="Calibri" panose="020F0502020204030204" pitchFamily="34" charset="0"/>
+              </a:rPr>
+              <a:t>Intelligent Supply Chain Management Platform for Electric Vehicle Manufacturing</a:t>
+            </a:r>
+          </a:p>
+          <a:p>
             <a:pPr algn="r"/>
-            <a:r>
-              <a:rPr lang="en-US" sz="1800" b="1" i="1" dirty="0">
-                <a:solidFill>
-                  <a:srgbClr val="FFFFFF"/>
-                </a:solidFill>
-              </a:rPr>
-              <a:t>Project Title -  Calibri body 18</a:t>
-            </a:r>
+            <a:endParaRPr lang="en-US" dirty="0"/>
           </a:p>
           <a:p>
             <a:pPr algn="r"/>
@@ -7404,14 +8603,14 @@
           <p:nvPr>
             <p:extLst>
               <p:ext uri="{D42A27DB-BD31-4B8C-83A1-F6EECF244321}">
-                <p14:modId xmlns:p14="http://schemas.microsoft.com/office/powerpoint/2010/main" val="2833881980"/>
+                <p14:modId xmlns:p14="http://schemas.microsoft.com/office/powerpoint/2010/main" val="1095849237"/>
               </p:ext>
             </p:extLst>
           </p:nvPr>
         </p:nvGraphicFramePr>
         <p:xfrm>
-          <a:off x="557552" y="1322186"/>
-          <a:ext cx="11378284" cy="3931920"/>
+          <a:off x="221274" y="1322185"/>
+          <a:ext cx="11714564" cy="4703856"/>
         </p:xfrm>
         <a:graphic>
           <a:graphicData uri="http://schemas.openxmlformats.org/drawingml/2006/table">
@@ -7420,28 +8619,28 @@
                 <a:tableStyleId>{5C22544A-7EE6-4342-B048-85BDC9FD1C3A}</a:tableStyleId>
               </a:tblPr>
               <a:tblGrid>
-                <a:gridCol w="2844571">
+                <a:gridCol w="2928641">
                   <a:extLst>
                     <a:ext uri="{9D8B030D-6E8A-4147-A177-3AD203B41FA5}">
                       <a16:colId xmlns:a16="http://schemas.microsoft.com/office/drawing/2014/main" val="3809988457"/>
                     </a:ext>
                   </a:extLst>
                 </a:gridCol>
-                <a:gridCol w="2844571">
+                <a:gridCol w="2928641">
                   <a:extLst>
                     <a:ext uri="{9D8B030D-6E8A-4147-A177-3AD203B41FA5}">
                       <a16:colId xmlns:a16="http://schemas.microsoft.com/office/drawing/2014/main" val="2477524976"/>
                     </a:ext>
                   </a:extLst>
                 </a:gridCol>
-                <a:gridCol w="2844571">
+                <a:gridCol w="2928641">
                   <a:extLst>
                     <a:ext uri="{9D8B030D-6E8A-4147-A177-3AD203B41FA5}">
                       <a16:colId xmlns:a16="http://schemas.microsoft.com/office/drawing/2014/main" val="3568668912"/>
                     </a:ext>
                   </a:extLst>
                 </a:gridCol>
-                <a:gridCol w="2844571">
+                <a:gridCol w="2928641">
                   <a:extLst>
                     <a:ext uri="{9D8B030D-6E8A-4147-A177-3AD203B41FA5}">
                       <a16:colId xmlns:a16="http://schemas.microsoft.com/office/drawing/2014/main" val="904458276"/>
@@ -7449,12 +8648,13 @@
                   </a:extLst>
                 </a:gridCol>
               </a:tblGrid>
-              <a:tr h="283293">
+              <a:tr h="437568">
                 <a:tc>
                   <a:txBody>
                     <a:bodyPr/>
                     <a:lstStyle/>
                     <a:p>
+                      <a:pPr algn="l"/>
                       <a:r>
                         <a:rPr lang="en-US" sz="1800" b="1" dirty="0"/>
                         <a:t>Study</a:t>
@@ -7469,8 +8669,9 @@
                     <a:bodyPr/>
                     <a:lstStyle/>
                     <a:p>
+                      <a:pPr algn="l"/>
                       <a:r>
-                        <a:rPr lang="en-US" sz="1800" b="1" dirty="0"/>
+                        <a:rPr lang="en-US" sz="1800" b="1"/>
                         <a:t>Approach</a:t>
                       </a:r>
                       <a:endParaRPr lang="en-US" sz="1800" dirty="0"/>
@@ -7483,8 +8684,9 @@
                     <a:bodyPr/>
                     <a:lstStyle/>
                     <a:p>
+                      <a:pPr algn="l"/>
                       <a:r>
-                        <a:rPr lang="en-US" sz="1800" b="1" dirty="0"/>
+                        <a:rPr lang="en-US" sz="1800" b="1"/>
                         <a:t>Key Contribution</a:t>
                       </a:r>
                       <a:endParaRPr lang="en-US" sz="1800" dirty="0"/>
@@ -7497,6 +8699,7 @@
                     <a:bodyPr/>
                     <a:lstStyle/>
                     <a:p>
+                      <a:pPr algn="l"/>
                       <a:r>
                         <a:rPr lang="en-US" sz="1800" b="1"/>
                         <a:t>Limitation / Research Gap</a:t>
@@ -7512,17 +8715,18 @@
                   </a:ext>
                 </a:extLst>
               </a:tr>
-              <a:tr h="647525">
+              <a:tr h="1422096">
                 <a:tc>
                   <a:txBody>
                     <a:bodyPr/>
                     <a:lstStyle/>
                     <a:p>
+                      <a:pPr algn="l"/>
                       <a:r>
-                        <a:rPr lang="en-US" sz="1800" b="1"/>
-                        <a:t>EV Supply Chain Management – Systematic Review (2023)</a:t>
+                        <a:rPr lang="en-US" sz="1800" b="1" dirty="0"/>
+                        <a:t>EV Supply Chain Management – Systematic Review </a:t>
                       </a:r>
-                      <a:endParaRPr lang="en-US" sz="1800"/>
+                      <a:endParaRPr lang="en-US" sz="1800" dirty="0"/>
                     </a:p>
                   </a:txBody>
                   <a:tcPr anchor="ctr"/>
@@ -7532,6 +8736,7 @@
                     <a:bodyPr/>
                     <a:lstStyle/>
                     <a:p>
+                      <a:pPr algn="l"/>
                       <a:r>
                         <a:rPr lang="en-US" sz="1800" dirty="0"/>
                         <a:t>Systematic literature review</a:t>
@@ -7545,6 +8750,7 @@
                     <a:bodyPr/>
                     <a:lstStyle/>
                     <a:p>
+                      <a:pPr algn="l"/>
                       <a:r>
                         <a:rPr lang="en-US" sz="1800"/>
                         <a:t>Identified major EV supply-chain challenges including sustainability, sourcing, cost and supply risks</a:t>
@@ -7558,10 +8764,12 @@
                     <a:bodyPr/>
                     <a:lstStyle/>
                     <a:p>
+                      <a:pPr algn="l"/>
                       <a:r>
-                        <a:rPr lang="en-US" sz="1800" dirty="0"/>
+                        <a:rPr lang="en-US" sz="1800"/>
                         <a:t>Limited focus on integrated AI-based decision-making</a:t>
                       </a:r>
+                      <a:endParaRPr lang="en-US" sz="1800" dirty="0"/>
                     </a:p>
                   </a:txBody>
                   <a:tcPr anchor="ctr"/>
@@ -7572,15 +8780,16 @@
                   </a:ext>
                 </a:extLst>
               </a:tr>
-              <a:tr h="647525">
+              <a:tr h="1422096">
                 <a:tc>
                   <a:txBody>
                     <a:bodyPr/>
                     <a:lstStyle/>
                     <a:p>
+                      <a:pPr algn="l"/>
                       <a:r>
                         <a:rPr lang="en-US" sz="1800" b="1" dirty="0"/>
-                        <a:t>EV Battery Supply Chain &amp; Critical Materials (2023)</a:t>
+                        <a:t>EV Battery Supply Chain &amp; Critical Materials </a:t>
                       </a:r>
                       <a:endParaRPr lang="en-US" sz="1800" dirty="0"/>
                     </a:p>
@@ -7592,6 +8801,7 @@
                     <a:bodyPr/>
                     <a:lstStyle/>
                     <a:p>
+                      <a:pPr algn="l"/>
                       <a:r>
                         <a:rPr lang="en-US" sz="1800" dirty="0"/>
                         <a:t>Battery and critical-material supply-chain analysis</a:t>
@@ -7605,6 +8815,7 @@
                     <a:bodyPr/>
                     <a:lstStyle/>
                     <a:p>
+                      <a:pPr algn="l"/>
                       <a:r>
                         <a:rPr lang="en-US" sz="1800"/>
                         <a:t>Identified material dependency, sourcing risks and battery supply challenges</a:t>
@@ -7618,6 +8829,7 @@
                     <a:bodyPr/>
                     <a:lstStyle/>
                     <a:p>
+                      <a:pPr algn="l"/>
                       <a:r>
                         <a:rPr lang="en-US" sz="1800"/>
                         <a:t>Focused mainly on batteries/materials rather than the complete manufacturing supply chain</a:t>
@@ -7632,17 +8844,18 @@
                   </a:ext>
                 </a:extLst>
               </a:tr>
-              <a:tr h="647525">
+              <a:tr h="1422096">
                 <a:tc>
                   <a:txBody>
                     <a:bodyPr/>
                     <a:lstStyle/>
                     <a:p>
+                      <a:pPr algn="l"/>
                       <a:r>
-                        <a:rPr lang="en-US" sz="1800" b="1"/>
-                        <a:t>AI for Supply Chain Resilience (2023)</a:t>
+                        <a:rPr lang="en-US" sz="1800" b="1" dirty="0"/>
+                        <a:t>AI for Supply Chain Resilience </a:t>
                       </a:r>
-                      <a:endParaRPr lang="en-US" sz="1800"/>
+                      <a:endParaRPr lang="en-US" sz="1800" dirty="0"/>
                     </a:p>
                   </a:txBody>
                   <a:tcPr anchor="ctr"/>
@@ -7652,10 +8865,12 @@
                     <a:bodyPr/>
                     <a:lstStyle/>
                     <a:p>
+                      <a:pPr algn="l"/>
                       <a:r>
-                        <a:rPr lang="en-US" sz="1800" dirty="0"/>
+                        <a:rPr lang="en-US" sz="1800"/>
                         <a:t>Machine Learning and AI-based supply-chain analysis</a:t>
                       </a:r>
+                      <a:endParaRPr lang="en-US" sz="1800" dirty="0"/>
                     </a:p>
                   </a:txBody>
                   <a:tcPr anchor="ctr"/>
@@ -7665,6 +8880,7 @@
                     <a:bodyPr/>
                     <a:lstStyle/>
                     <a:p>
+                      <a:pPr algn="l"/>
                       <a:r>
                         <a:rPr lang="en-US" sz="1800"/>
                         <a:t>Demonstrated the potential of AI for prediction, disruption detection and resilient supply chains</a:t>
@@ -7678,6 +8894,7 @@
                     <a:bodyPr/>
                     <a:lstStyle/>
                     <a:p>
+                      <a:pPr algn="l"/>
                       <a:r>
                         <a:rPr lang="en-US" sz="1800" dirty="0"/>
                         <a:t>AI solutions are mostly applied to individual supply-chain problems</a:t>
@@ -7706,13 +8923,13 @@
   <p:clrMapOvr>
     <a:masterClrMapping/>
   </p:clrMapOvr>
-  <mc:AlternateContent xmlns:mc="http://schemas.openxmlformats.org/markup-compatibility/2006">
-    <mc:Choice xmlns:p14="http://schemas.microsoft.com/office/powerpoint/2010/main" Requires="p14">
+  <mc:AlternateContent xmlns:mc="http://schemas.openxmlformats.org/markup-compatibility/2006" xmlns:p14="http://schemas.microsoft.com/office/powerpoint/2010/main">
+    <mc:Choice Requires="p14">
       <p:transition spd="med" p14:dur="700">
         <p:fade/>
       </p:transition>
     </mc:Choice>
-    <mc:Fallback>
+    <mc:Fallback xmlns="">
       <p:transition spd="med">
         <p:fade/>
       </p:transition>
@@ -7868,8 +9085,8 @@
         </p:nvSpPr>
         <p:spPr>
           <a:xfrm>
-            <a:off x="6093893" y="57036"/>
-            <a:ext cx="6098107" cy="646331"/>
+            <a:off x="3962401" y="57036"/>
+            <a:ext cx="8229600" cy="1200329"/>
           </a:xfrm>
           <a:prstGeom prst="rect">
             <a:avLst/>
@@ -7882,15 +9099,30 @@
           </a:bodyPr>
           <a:lstStyle/>
           <a:p>
+            <a:pPr algn="ctr">
+              <a:defRPr/>
+            </a:pPr>
+            <a:r>
+              <a:rPr lang="en-US" b="1" dirty="0">
+                <a:solidFill>
+                  <a:prstClr val="white"/>
+                </a:solidFill>
+                <a:cs typeface="Calibri" panose="020F0502020204030204" pitchFamily="34" charset="0"/>
+              </a:rPr>
+              <a:t>Intelligent Supply Chain Management Platform for Electric Vehicle Manufacturing</a:t>
+            </a:r>
+          </a:p>
+          <a:p>
             <a:pPr algn="r"/>
-            <a:r>
-              <a:rPr lang="en-US" sz="1800" b="1" i="1" dirty="0">
-                <a:solidFill>
-                  <a:srgbClr val="FFFFFF"/>
-                </a:solidFill>
-              </a:rPr>
-              <a:t>Project Title -  Calibri body 18</a:t>
-            </a:r>
+            <a:endParaRPr lang="en-US" dirty="0"/>
+          </a:p>
+          <a:p>
+            <a:pPr algn="r"/>
+            <a:endParaRPr lang="en-US" sz="1800" b="1" i="1" dirty="0">
+              <a:solidFill>
+                <a:srgbClr val="FFFFFF"/>
+              </a:solidFill>
+            </a:endParaRPr>
           </a:p>
           <a:p>
             <a:pPr algn="r"/>
@@ -7913,7 +9145,7 @@
           <p:nvPr>
             <p:extLst>
               <p:ext uri="{D42A27DB-BD31-4B8C-83A1-F6EECF244321}">
-                <p14:modId xmlns:p14="http://schemas.microsoft.com/office/powerpoint/2010/main" val="2752288962"/>
+                <p14:modId xmlns:p14="http://schemas.microsoft.com/office/powerpoint/2010/main" val="4110796855"/>
               </p:ext>
             </p:extLst>
           </p:nvPr>
@@ -8028,10 +9260,10 @@
                     <a:lstStyle/>
                     <a:p>
                       <a:r>
-                        <a:rPr lang="en-US" sz="1800" b="1"/>
-                        <a:t>ML-Based Backorder Prediction (2024)</a:t>
+                        <a:rPr lang="en-US" sz="1800" b="1" dirty="0"/>
+                        <a:t>ML-Based Backorder Prediction </a:t>
                       </a:r>
-                      <a:endParaRPr lang="en-US" sz="1800"/>
+                      <a:endParaRPr lang="en-US" sz="1800" dirty="0"/>
                     </a:p>
                   </a:txBody>
                   <a:tcPr anchor="ctr"/>
@@ -8088,10 +9320,10 @@
                     <a:lstStyle/>
                     <a:p>
                       <a:r>
-                        <a:rPr lang="en-US" sz="1800" b="1"/>
-                        <a:t>Knowledge Graphs &amp; LLMs for Supply Chain Visibility (2024)</a:t>
+                        <a:rPr lang="en-US" sz="1800" b="1" dirty="0"/>
+                        <a:t>Knowledge Graphs &amp; LLMs for Supply Chain Visibility </a:t>
                       </a:r>
-                      <a:endParaRPr lang="en-US" sz="1800"/>
+                      <a:endParaRPr lang="en-US" sz="1800" dirty="0"/>
                     </a:p>
                   </a:txBody>
                   <a:tcPr anchor="ctr"/>
@@ -8102,7 +9334,7 @@
                     <a:lstStyle/>
                     <a:p>
                       <a:r>
-                        <a:rPr lang="en-US" sz="1800"/>
+                        <a:rPr lang="en-US" sz="1800" dirty="0"/>
                         <a:t>Knowledge Graph + Large Language Model</a:t>
                       </a:r>
                     </a:p>
@@ -8148,10 +9380,10 @@
                     <a:lstStyle/>
                     <a:p>
                       <a:r>
-                        <a:rPr lang="en-US" sz="1800" b="1"/>
-                        <a:t>Supplier Evaluation &amp; Risk Prediction for EV Industry (2026)</a:t>
+                        <a:rPr lang="en-US" sz="1800" b="1" dirty="0"/>
+                        <a:t>Supplier Evaluation &amp; Risk Prediction for EV Industry </a:t>
                       </a:r>
-                      <a:endParaRPr lang="en-US" sz="1800"/>
+                      <a:endParaRPr lang="en-US" sz="1800" dirty="0"/>
                     </a:p>
                   </a:txBody>
                   <a:tcPr anchor="ctr"/>
@@ -8162,7 +9394,7 @@
                     <a:lstStyle/>
                     <a:p>
                       <a:r>
-                        <a:rPr lang="en-US" sz="1800"/>
+                        <a:rPr lang="en-US" sz="1800" dirty="0"/>
                         <a:t>Multi-criteria supplier evaluation + XGBoost</a:t>
                       </a:r>
                     </a:p>
@@ -8222,10 +9454,10 @@
                     <a:lstStyle/>
                     <a:p>
                       <a:r>
-                        <a:rPr lang="en-US" sz="1800" b="1"/>
+                        <a:rPr lang="en-US" sz="1800" b="1" dirty="0"/>
                         <a:t>ML + XGBoost + Optimization + Knowledge Graph + Graph-RAG + Agentic AI</a:t>
                       </a:r>
-                      <a:endParaRPr lang="en-US" sz="1800"/>
+                      <a:endParaRPr lang="en-US" sz="1800" dirty="0"/>
                     </a:p>
                   </a:txBody>
                   <a:tcPr anchor="ctr"/>
@@ -8344,22 +9576,28 @@
           <a:p>
             <a:pPr algn="just"/>
             <a:r>
-              <a:rPr lang="en-US" b="0" dirty="0">
+              <a:rPr lang="en-US" sz="2400" dirty="0">
                 <a:latin typeface="+mn-lt"/>
               </a:rPr>
-              <a:t>Existing studies usually address individual problems such as EV battery supply risk, supplier evaluation, demand/backorder prediction, resilience, or Knowledge Graph-based visibility. There is limited work combining these capabilities into a single end-to-end EV manufacturing supply-chain platform.</a:t>
+              <a:t>Existing studies </a:t>
+            </a:r>
+            <a:r>
+              <a:rPr lang="en-US" sz="2400" b="0" dirty="0">
+                <a:latin typeface="+mn-lt"/>
+              </a:rPr>
+              <a:t>usually address individual problems such as EV battery supply risk, supplier evaluation, demand/backorder prediction, resilience, or Knowledge Graph-based visibility. There is limited work combining these capabilities into a single end-to-end EV manufacturing supply-chain platform.</a:t>
             </a:r>
           </a:p>
           <a:p>
             <a:pPr algn="just"/>
-            <a:endParaRPr lang="en-US" b="0" dirty="0">
+            <a:endParaRPr lang="en-US" sz="2400" b="0" dirty="0">
               <a:latin typeface="+mn-lt"/>
             </a:endParaRPr>
           </a:p>
           <a:p>
             <a:pPr algn="just"/>
             <a:r>
-              <a:rPr lang="en-US" b="0" dirty="0">
+              <a:rPr lang="en-US" sz="2400" dirty="0">
                 <a:latin typeface="+mn-lt"/>
               </a:rPr>
               <a:t>Proposed Solution:</a:t>
@@ -8368,10 +9606,20 @@
           <a:p>
             <a:pPr algn="just"/>
             <a:r>
-              <a:rPr lang="en-US" b="0" dirty="0">
+              <a:rPr lang="en-US" sz="2400" b="0" dirty="0">
                 <a:latin typeface="+mn-lt"/>
               </a:rPr>
-              <a:t>BOM Planning → Inventory Optimization → Supplier Risk Prediction → Intelligent Procurement → Purchase Order Tracking → Knowledge Graph → Graph-RAG → Agentic AI Decision Support.</a:t>
+              <a:t>BOM[</a:t>
+            </a:r>
+            <a:r>
+              <a:rPr lang="en-IN" sz="2400" b="0" dirty="0"/>
+              <a:t>Bill of Materials</a:t>
+            </a:r>
+            <a:r>
+              <a:rPr lang="en-US" sz="2400" b="0" dirty="0">
+                <a:latin typeface="+mn-lt"/>
+              </a:rPr>
+              <a:t>] Planning → Inventory Optimization → Supplier Risk Prediction → Intelligent Procurement → Purchase Order Tracking → Knowledge Graph → Graph-RAG → Agentic AI Decision Support.</a:t>
             </a:r>
           </a:p>
           <a:p>
@@ -8381,7 +9629,7 @@
               </a:lnSpc>
               <a:buNone/>
             </a:pPr>
-            <a:endParaRPr lang="en-US" b="0" dirty="0">
+            <a:endParaRPr lang="en-US" sz="2400" b="0" dirty="0">
               <a:solidFill>
                 <a:srgbClr val="5583D1"/>
               </a:solidFill>
@@ -8514,8 +9762,8 @@
         </p:nvSpPr>
         <p:spPr>
           <a:xfrm>
-            <a:off x="6093893" y="57036"/>
-            <a:ext cx="6098107" cy="646331"/>
+            <a:off x="4049487" y="57036"/>
+            <a:ext cx="8142514" cy="923330"/>
           </a:xfrm>
           <a:prstGeom prst="rect">
             <a:avLst/>
@@ -8528,15 +9776,22 @@
           </a:bodyPr>
           <a:lstStyle/>
           <a:p>
+            <a:pPr algn="ctr">
+              <a:defRPr/>
+            </a:pPr>
+            <a:r>
+              <a:rPr lang="en-US" b="1" dirty="0">
+                <a:solidFill>
+                  <a:prstClr val="white"/>
+                </a:solidFill>
+                <a:cs typeface="Calibri" panose="020F0502020204030204" pitchFamily="34" charset="0"/>
+              </a:rPr>
+              <a:t>Intelligent Supply Chain Management Platform for Electric Vehicle Manufacturing</a:t>
+            </a:r>
+          </a:p>
+          <a:p>
             <a:pPr algn="r"/>
-            <a:r>
-              <a:rPr lang="en-US" sz="1800" b="1" i="1" dirty="0">
-                <a:solidFill>
-                  <a:srgbClr val="FFFFFF"/>
-                </a:solidFill>
-              </a:rPr>
-              <a:t>Project Title -  Calibri body 18</a:t>
-            </a:r>
+            <a:endParaRPr lang="en-US" dirty="0"/>
           </a:p>
           <a:p>
             <a:pPr algn="r"/>
@@ -8798,88 +10053,88 @@
           <a:bodyPr/>
           <a:lstStyle/>
           <a:p>
+            <a:pPr lvl="0"/>
+            <a:r>
+              <a:rPr lang="en-IN" sz="2400" dirty="0"/>
+              <a:t>Tech Stack: </a:t>
+            </a:r>
+            <a:r>
+              <a:rPr lang="en-IN" sz="2400" b="0" dirty="0"/>
+              <a:t>React.js, Fast-API, PostgreSQL, Python, XGBoost, Neo4j, Graph-RAG, LLMs, and Agentic AI.</a:t>
+            </a:r>
+          </a:p>
+          <a:p>
+            <a:pPr lvl="0"/>
+            <a:r>
+              <a:rPr lang="en-IN" sz="2400" dirty="0"/>
+              <a:t>Core Modules: </a:t>
+            </a:r>
+            <a:r>
+              <a:rPr lang="en-IN" sz="2400" b="0" dirty="0"/>
+              <a:t>BOM</a:t>
+            </a:r>
+            <a:r>
+              <a:rPr lang="en-US" sz="2400" b="0" dirty="0"/>
+              <a:t> [</a:t>
+            </a:r>
+            <a:r>
+              <a:rPr lang="en-IN" sz="2400" b="0" dirty="0"/>
+              <a:t>Bill of Materials</a:t>
+            </a:r>
+            <a:r>
+              <a:rPr lang="en-US" sz="2400" b="0" dirty="0"/>
+              <a:t>]</a:t>
+            </a:r>
+            <a:r>
+              <a:rPr lang="en-IN" sz="2400" b="0" dirty="0"/>
+              <a:t> planning, inventory management, supplier intelligence, procurement, risk analysis, and purchase order tracking.</a:t>
+            </a:r>
+          </a:p>
+          <a:p>
+            <a:pPr lvl="0"/>
+            <a:r>
+              <a:rPr lang="en-IN" sz="2400" dirty="0"/>
+              <a:t>AI Intelligence: </a:t>
+            </a:r>
+            <a:r>
+              <a:rPr lang="en-IN" sz="2400" b="0" dirty="0"/>
+              <a:t>XGBoost-based supplier risk prediction, multi-criteria supplier ranking, and intelligent procurement recommendations.</a:t>
+            </a:r>
+          </a:p>
+          <a:p>
+            <a:pPr lvl="0"/>
+            <a:r>
+              <a:rPr lang="en-IN" sz="2400" dirty="0"/>
+              <a:t>Knowledge Intelligence</a:t>
+            </a:r>
+            <a:r>
+              <a:rPr lang="en-IN" sz="2400" b="0" dirty="0"/>
+              <a:t>: Neo4j Knowledge Graph and Graph-RAG for connected supply-chain analysis and natural-language querying.</a:t>
+            </a:r>
+          </a:p>
+          <a:p>
+            <a:pPr lvl="0"/>
+            <a:r>
+              <a:rPr lang="en-IN" sz="2400" dirty="0"/>
+              <a:t>Agentic AI: </a:t>
+            </a:r>
+            <a:r>
+              <a:rPr lang="en-IN" sz="2400" b="0" dirty="0"/>
+              <a:t>Specialized AI agents for inventory, supplier, procurement, and risk analysis with automated decision support.</a:t>
+            </a:r>
+          </a:p>
+          <a:p>
             <a:pPr algn="just">
               <a:lnSpc>
                 <a:spcPct val="150000"/>
               </a:lnSpc>
             </a:pPr>
-            <a:r>
-              <a:rPr lang="en-US" b="0" dirty="0">
-                <a:solidFill>
-                  <a:srgbClr val="5583D1"/>
-                </a:solidFill>
-                <a:latin typeface="+mn-lt"/>
-              </a:rPr>
-              <a:t>Tech Stack: React.js, </a:t>
-            </a:r>
-            <a:r>
-              <a:rPr lang="en-US" b="0" dirty="0" err="1">
-                <a:solidFill>
-                  <a:srgbClr val="5583D1"/>
-                </a:solidFill>
-                <a:latin typeface="+mn-lt"/>
-              </a:rPr>
-              <a:t>FastAPI</a:t>
-            </a:r>
-            <a:r>
-              <a:rPr lang="en-US" b="0" dirty="0">
-                <a:solidFill>
-                  <a:srgbClr val="5583D1"/>
-                </a:solidFill>
-                <a:latin typeface="+mn-lt"/>
-              </a:rPr>
-              <a:t>, PostgreSQL, Python, </a:t>
-            </a:r>
-            <a:r>
-              <a:rPr lang="en-US" b="0" dirty="0" err="1">
-                <a:solidFill>
-                  <a:srgbClr val="5583D1"/>
-                </a:solidFill>
-                <a:latin typeface="+mn-lt"/>
-              </a:rPr>
-              <a:t>XGBoost</a:t>
-            </a:r>
-            <a:r>
-              <a:rPr lang="en-US" b="0" dirty="0">
-                <a:solidFill>
-                  <a:srgbClr val="5583D1"/>
-                </a:solidFill>
-                <a:latin typeface="+mn-lt"/>
-              </a:rPr>
-              <a:t>, ML, Neo4j, Graph-RAG, LLMs, and Agentic AI.</a:t>
-            </a:r>
-          </a:p>
-          <a:p>
-            <a:pPr algn="just">
-              <a:lnSpc>
-                <a:spcPct val="150000"/>
-              </a:lnSpc>
-            </a:pPr>
-            <a:r>
-              <a:rPr lang="en-US" b="0" dirty="0">
-                <a:solidFill>
-                  <a:srgbClr val="5583D1"/>
-                </a:solidFill>
-                <a:latin typeface="+mn-lt"/>
-              </a:rPr>
-              <a:t>Core Modules: Demand forecasting, BOM planning, inventory optimization, supplier risk analysis, procurement, and order tracking.</a:t>
-            </a:r>
-          </a:p>
-          <a:p>
-            <a:pPr algn="just">
-              <a:lnSpc>
-                <a:spcPct val="150000"/>
-              </a:lnSpc>
-            </a:pPr>
-            <a:r>
-              <a:rPr lang="en-US" b="0" dirty="0">
-                <a:solidFill>
-                  <a:srgbClr val="5583D1"/>
-                </a:solidFill>
-                <a:latin typeface="+mn-lt"/>
-              </a:rPr>
-              <a:t>AI Intelligence: Predictive analytics, supplier recommendations, risk prediction, and AI-agent-based decision support.</a:t>
-            </a:r>
+            <a:endParaRPr lang="en-US" sz="2400" b="0" dirty="0">
+              <a:solidFill>
+                <a:srgbClr val="5583D1"/>
+              </a:solidFill>
+              <a:latin typeface="+mn-lt"/>
+            </a:endParaRPr>
           </a:p>
         </p:txBody>
       </p:sp>
@@ -9007,8 +10262,8 @@
         </p:nvSpPr>
         <p:spPr>
           <a:xfrm>
-            <a:off x="6093893" y="57036"/>
-            <a:ext cx="6098107" cy="646331"/>
+            <a:off x="3947887" y="57036"/>
+            <a:ext cx="8244114" cy="923330"/>
           </a:xfrm>
           <a:prstGeom prst="rect">
             <a:avLst/>
@@ -9021,15 +10276,22 @@
           </a:bodyPr>
           <a:lstStyle/>
           <a:p>
+            <a:pPr algn="ctr">
+              <a:defRPr/>
+            </a:pPr>
+            <a:r>
+              <a:rPr lang="en-US" b="1" dirty="0">
+                <a:solidFill>
+                  <a:prstClr val="white"/>
+                </a:solidFill>
+                <a:cs typeface="Calibri" panose="020F0502020204030204" pitchFamily="34" charset="0"/>
+              </a:rPr>
+              <a:t>Intelligent Supply Chain Management Platform for Electric Vehicle Manufacturing</a:t>
+            </a:r>
+          </a:p>
+          <a:p>
             <a:pPr algn="r"/>
-            <a:r>
-              <a:rPr lang="en-US" sz="1800" b="1" i="1" dirty="0">
-                <a:solidFill>
-                  <a:srgbClr val="FFFFFF"/>
-                </a:solidFill>
-              </a:rPr>
-              <a:t>Project Title -  Calibri body 18</a:t>
-            </a:r>
+            <a:endParaRPr lang="en-US" dirty="0"/>
           </a:p>
           <a:p>
             <a:pPr algn="r"/>
@@ -9214,6 +10476,104 @@
                       </p:childTnLst>
                     </p:cTn>
                   </p:par>
+                  <p:par>
+                    <p:cTn id="15" fill="hold">
+                      <p:stCondLst>
+                        <p:cond delay="indefinite"/>
+                      </p:stCondLst>
+                      <p:childTnLst>
+                        <p:par>
+                          <p:cTn id="16" fill="hold">
+                            <p:stCondLst>
+                              <p:cond delay="0"/>
+                            </p:stCondLst>
+                            <p:childTnLst>
+                              <p:par>
+                                <p:cTn id="17" presetID="1" presetClass="entr" presetSubtype="0" fill="hold" grpId="0" nodeType="clickEffect">
+                                  <p:stCondLst>
+                                    <p:cond delay="0"/>
+                                  </p:stCondLst>
+                                  <p:childTnLst>
+                                    <p:set>
+                                      <p:cBhvr>
+                                        <p:cTn id="18" dur="1" fill="hold">
+                                          <p:stCondLst>
+                                            <p:cond delay="0"/>
+                                          </p:stCondLst>
+                                        </p:cTn>
+                                        <p:tgtEl>
+                                          <p:spTgt spid="2">
+                                            <p:txEl>
+                                              <p:pRg st="3" end="3"/>
+                                            </p:txEl>
+                                          </p:spTgt>
+                                        </p:tgtEl>
+                                        <p:attrNameLst>
+                                          <p:attrName>style.visibility</p:attrName>
+                                        </p:attrNameLst>
+                                      </p:cBhvr>
+                                      <p:to>
+                                        <p:strVal val="visible"/>
+                                      </p:to>
+                                    </p:set>
+                                  </p:childTnLst>
+                                </p:cTn>
+                              </p:par>
+                            </p:childTnLst>
+                          </p:cTn>
+                        </p:par>
+                      </p:childTnLst>
+                    </p:cTn>
+                  </p:par>
+                  <p:par>
+                    <p:cTn id="19" fill="hold">
+                      <p:stCondLst>
+                        <p:cond delay="indefinite"/>
+                      </p:stCondLst>
+                      <p:childTnLst>
+                        <p:par>
+                          <p:cTn id="20" fill="hold">
+                            <p:stCondLst>
+                              <p:cond delay="0"/>
+                            </p:stCondLst>
+                            <p:childTnLst>
+                              <p:par>
+                                <p:cTn id="21" presetID="1" presetClass="entr" presetSubtype="0" fill="hold" grpId="0" nodeType="clickEffect">
+                                  <p:stCondLst>
+                                    <p:cond delay="0"/>
+                                  </p:stCondLst>
+                                  <p:childTnLst>
+                                    <p:set>
+                                      <p:cBhvr>
+                                        <p:cTn id="22" dur="1" fill="hold">
+                                          <p:stCondLst>
+                                            <p:cond delay="0"/>
+                                          </p:stCondLst>
+                                        </p:cTn>
+                                        <p:tgtEl>
+                                          <p:spTgt spid="2">
+                                            <p:txEl>
+                                              <p:pRg st="4" end="4"/>
+                                            </p:txEl>
+                                          </p:spTgt>
+                                        </p:tgtEl>
+                                        <p:attrNameLst>
+                                          <p:attrName>style.visibility</p:attrName>
+                                        </p:attrNameLst>
+                                      </p:cBhvr>
+                                      <p:to>
+                                        <p:strVal val="visible"/>
+                                      </p:to>
+                                    </p:set>
+                                  </p:childTnLst>
+                                </p:cTn>
+                              </p:par>
+                            </p:childTnLst>
+                          </p:cTn>
+                        </p:par>
+                      </p:childTnLst>
+                    </p:cTn>
+                  </p:par>
                 </p:childTnLst>
               </p:cTn>
               <p:prevCondLst>
@@ -9285,125 +10645,130 @@
           <a:bodyPr/>
           <a:lstStyle/>
           <a:p>
-            <a:r>
-              <a:rPr lang="en-US" dirty="0">
-                <a:latin typeface="+mn-lt"/>
-              </a:rPr>
-              <a:t>Module 1: Inventory Management</a:t>
-            </a:r>
-          </a:p>
-          <a:p>
-            <a:r>
-              <a:rPr lang="en-US" b="0" dirty="0">
-                <a:latin typeface="+mn-lt"/>
-              </a:rPr>
-              <a:t>• Subtopic: Intelligent Inventory Planning</a:t>
-            </a:r>
-            <a:br>
-              <a:rPr lang="en-US" b="0" dirty="0">
-                <a:latin typeface="+mn-lt"/>
-              </a:rPr>
-            </a:br>
-            <a:r>
-              <a:rPr lang="en-US" b="0" dirty="0">
-                <a:latin typeface="+mn-lt"/>
-              </a:rPr>
-              <a:t>• Vehicle BOM-based component requirement</a:t>
-            </a:r>
-            <a:br>
-              <a:rPr lang="en-US" b="0" dirty="0">
-                <a:latin typeface="+mn-lt"/>
-              </a:rPr>
-            </a:br>
-            <a:r>
-              <a:rPr lang="en-US" b="0" dirty="0">
-                <a:latin typeface="+mn-lt"/>
-              </a:rPr>
-              <a:t>• Stock, safety stock &amp; shortage analysis</a:t>
-            </a:r>
-            <a:br>
-              <a:rPr lang="en-US" b="0" dirty="0">
-                <a:latin typeface="+mn-lt"/>
-              </a:rPr>
-            </a:br>
-            <a:r>
-              <a:rPr lang="en-US" b="0" dirty="0">
-                <a:latin typeface="+mn-lt"/>
-              </a:rPr>
-              <a:t>• Multi-warehouse inventory management</a:t>
-            </a:r>
-          </a:p>
-          <a:p>
-            <a:endParaRPr lang="en-US" b="0" dirty="0">
-              <a:latin typeface="+mn-lt"/>
-            </a:endParaRPr>
-          </a:p>
-          <a:p>
-            <a:r>
-              <a:rPr lang="en-US" dirty="0">
-                <a:latin typeface="+mn-lt"/>
-              </a:rPr>
-              <a:t>Module 2: Supplier Intelligence</a:t>
-            </a:r>
-          </a:p>
-          <a:p>
-            <a:r>
-              <a:rPr lang="en-US" b="0" dirty="0">
-                <a:latin typeface="+mn-lt"/>
-              </a:rPr>
-              <a:t>• Subtopic: Supplier Performance &amp; Risk Analysis</a:t>
-            </a:r>
-            <a:br>
-              <a:rPr lang="en-US" b="0" dirty="0">
-                <a:latin typeface="+mn-lt"/>
-              </a:rPr>
-            </a:br>
-            <a:r>
-              <a:rPr lang="en-US" b="0" dirty="0">
-                <a:latin typeface="+mn-lt"/>
-              </a:rPr>
-              <a:t>• Supplier reliability, quality &amp; lead-time analysis</a:t>
-            </a:r>
-            <a:br>
-              <a:rPr lang="en-US" b="0" dirty="0">
-                <a:latin typeface="+mn-lt"/>
-              </a:rPr>
-            </a:br>
-            <a:r>
-              <a:rPr lang="en-US" b="0" dirty="0">
-                <a:latin typeface="+mn-lt"/>
-              </a:rPr>
-              <a:t>• </a:t>
-            </a:r>
-            <a:r>
-              <a:rPr lang="en-US" b="0" dirty="0" err="1">
-                <a:latin typeface="+mn-lt"/>
-              </a:rPr>
-              <a:t>XGBoost</a:t>
-            </a:r>
-            <a:r>
-              <a:rPr lang="en-US" b="0" dirty="0">
-                <a:latin typeface="+mn-lt"/>
-              </a:rPr>
-              <a:t>-based supplier risk prediction</a:t>
-            </a:r>
-            <a:br>
-              <a:rPr lang="en-US" b="0" dirty="0">
-                <a:latin typeface="+mn-lt"/>
-              </a:rPr>
-            </a:br>
-            <a:r>
-              <a:rPr lang="en-US" b="0" dirty="0">
-                <a:latin typeface="+mn-lt"/>
-              </a:rPr>
-              <a:t>• Supplier capacity &amp; availability analysis</a:t>
-            </a:r>
-          </a:p>
-          <a:p>
             <a:pPr marL="0" indent="0">
               <a:buNone/>
             </a:pPr>
-            <a:endParaRPr lang="en-US" b="0" dirty="0">
+            <a:r>
+              <a:rPr lang="en-IN" sz="2400" dirty="0">
+                <a:latin typeface="+mn-lt"/>
+              </a:rPr>
+              <a:t>Module 1: Inventory Management — Intelligent Inventory Planning</a:t>
+            </a:r>
+          </a:p>
+          <a:p>
+            <a:pPr lvl="0"/>
+            <a:r>
+              <a:rPr lang="en-IN" sz="2400" b="0" dirty="0">
+                <a:latin typeface="+mn-lt"/>
+              </a:rPr>
+              <a:t>Vehicle BOM</a:t>
+            </a:r>
+            <a:r>
+              <a:rPr lang="en-US" sz="2400" b="0" dirty="0"/>
+              <a:t> [</a:t>
+            </a:r>
+            <a:r>
+              <a:rPr lang="en-IN" sz="2400" b="0" dirty="0"/>
+              <a:t>Bill of Materials</a:t>
+            </a:r>
+            <a:r>
+              <a:rPr lang="en-US" sz="2400" b="0" dirty="0"/>
+              <a:t>] </a:t>
+            </a:r>
+            <a:r>
+              <a:rPr lang="en-IN" sz="2400" b="0" dirty="0">
+                <a:latin typeface="+mn-lt"/>
+              </a:rPr>
+              <a:t>-based component requirements </a:t>
+            </a:r>
+          </a:p>
+          <a:p>
+            <a:pPr lvl="0"/>
+            <a:r>
+              <a:rPr lang="en-IN" sz="2400" b="0" dirty="0">
+                <a:latin typeface="+mn-lt"/>
+              </a:rPr>
+              <a:t>Stock, safety stock, incoming stock &amp; shortage analysis </a:t>
+            </a:r>
+          </a:p>
+          <a:p>
+            <a:pPr lvl="0"/>
+            <a:r>
+              <a:rPr lang="en-IN" sz="2400" b="0" dirty="0">
+                <a:latin typeface="+mn-lt"/>
+              </a:rPr>
+              <a:t>Multi-warehouse inventory and transaction management </a:t>
+            </a:r>
+          </a:p>
+          <a:p>
+            <a:pPr lvl="0"/>
+            <a:r>
+              <a:rPr lang="en-IN" sz="2400" b="0" dirty="0">
+                <a:latin typeface="+mn-lt"/>
+              </a:rPr>
+              <a:t>Procurement quantity &amp; urgency identification </a:t>
+            </a:r>
+          </a:p>
+          <a:p>
+            <a:pPr marL="0" indent="0">
+              <a:buNone/>
+            </a:pPr>
+            <a:endParaRPr lang="en-IN" sz="2400" b="0" dirty="0">
+              <a:latin typeface="+mn-lt"/>
+            </a:endParaRPr>
+          </a:p>
+          <a:p>
+            <a:pPr marL="0" indent="0">
+              <a:buNone/>
+            </a:pPr>
+            <a:r>
+              <a:rPr lang="en-IN" sz="2400" dirty="0">
+                <a:latin typeface="+mn-lt"/>
+              </a:rPr>
+              <a:t>Module 2: Supplier Intelligence — Supplier Performance &amp; Risk Analysis</a:t>
+            </a:r>
+          </a:p>
+          <a:p>
+            <a:pPr lvl="0"/>
+            <a:r>
+              <a:rPr lang="en-IN" sz="2400" b="0" dirty="0">
+                <a:latin typeface="+mn-lt"/>
+              </a:rPr>
+              <a:t>Supplier quality, reliability &amp; historical performance analysis </a:t>
+            </a:r>
+          </a:p>
+          <a:p>
+            <a:pPr lvl="0"/>
+            <a:r>
+              <a:rPr lang="en-IN" sz="2400" b="0" dirty="0">
+                <a:latin typeface="+mn-lt"/>
+              </a:rPr>
+              <a:t>XGBoost-based supplier risk prediction </a:t>
+            </a:r>
+          </a:p>
+          <a:p>
+            <a:pPr lvl="0"/>
+            <a:r>
+              <a:rPr lang="en-IN" sz="2400" b="0" dirty="0">
+                <a:latin typeface="+mn-lt"/>
+              </a:rPr>
+              <a:t>Supplier capacity, availability &amp; lead-time analysis </a:t>
+            </a:r>
+          </a:p>
+          <a:p>
+            <a:pPr lvl="0"/>
+            <a:r>
+              <a:rPr lang="en-IN" sz="2400" b="0" dirty="0">
+                <a:latin typeface="+mn-lt"/>
+              </a:rPr>
+              <a:t>Supplier performance monitoring </a:t>
+            </a:r>
+          </a:p>
+          <a:p>
+            <a:pPr marL="0" indent="0">
+              <a:buNone/>
+            </a:pPr>
+            <a:endParaRPr lang="en-US" sz="2400" b="0" dirty="0">
               <a:solidFill>
                 <a:srgbClr val="5583D1"/>
               </a:solidFill>
@@ -9536,8 +10901,8 @@
         </p:nvSpPr>
         <p:spPr>
           <a:xfrm>
-            <a:off x="6093893" y="57036"/>
-            <a:ext cx="6098107" cy="646331"/>
+            <a:off x="3831771" y="57036"/>
+            <a:ext cx="8360230" cy="1200329"/>
           </a:xfrm>
           <a:prstGeom prst="rect">
             <a:avLst/>
@@ -9550,15 +10915,30 @@
           </a:bodyPr>
           <a:lstStyle/>
           <a:p>
+            <a:pPr algn="ctr">
+              <a:defRPr/>
+            </a:pPr>
+            <a:r>
+              <a:rPr lang="en-US" b="1" dirty="0">
+                <a:solidFill>
+                  <a:prstClr val="white"/>
+                </a:solidFill>
+                <a:cs typeface="Calibri" panose="020F0502020204030204" pitchFamily="34" charset="0"/>
+              </a:rPr>
+              <a:t>Intelligent Supply Chain Management Platform for Electric Vehicle Manufacturing</a:t>
+            </a:r>
+          </a:p>
+          <a:p>
             <a:pPr algn="r"/>
-            <a:r>
-              <a:rPr lang="en-US" sz="1800" b="1" i="1" dirty="0">
-                <a:solidFill>
-                  <a:srgbClr val="FFFFFF"/>
-                </a:solidFill>
-              </a:rPr>
-              <a:t>Project Title -  Calibri body 18</a:t>
-            </a:r>
+            <a:endParaRPr lang="en-US" dirty="0"/>
+          </a:p>
+          <a:p>
+            <a:pPr algn="r"/>
+            <a:endParaRPr lang="en-US" sz="1800" b="1" i="1" dirty="0">
+              <a:solidFill>
+                <a:srgbClr val="FFFFFF"/>
+              </a:solidFill>
+            </a:endParaRPr>
           </a:p>
           <a:p>
             <a:pPr algn="r"/>
@@ -9722,7 +11102,7 @@
                                         <p:tgtEl>
                                           <p:spTgt spid="2">
                                             <p:txEl>
-                                              <p:pRg st="3" end="3"/>
+                                              <p:pRg st="2" end="2"/>
                                             </p:txEl>
                                           </p:spTgt>
                                         </p:tgtEl>
@@ -9771,7 +11151,301 @@
                                         <p:tgtEl>
                                           <p:spTgt spid="2">
                                             <p:txEl>
+                                              <p:pRg st="3" end="3"/>
+                                            </p:txEl>
+                                          </p:spTgt>
+                                        </p:tgtEl>
+                                        <p:attrNameLst>
+                                          <p:attrName>style.visibility</p:attrName>
+                                        </p:attrNameLst>
+                                      </p:cBhvr>
+                                      <p:to>
+                                        <p:strVal val="visible"/>
+                                      </p:to>
+                                    </p:set>
+                                  </p:childTnLst>
+                                </p:cTn>
+                              </p:par>
+                            </p:childTnLst>
+                          </p:cTn>
+                        </p:par>
+                      </p:childTnLst>
+                    </p:cTn>
+                  </p:par>
+                  <p:par>
+                    <p:cTn id="19" fill="hold">
+                      <p:stCondLst>
+                        <p:cond delay="indefinite"/>
+                      </p:stCondLst>
+                      <p:childTnLst>
+                        <p:par>
+                          <p:cTn id="20" fill="hold">
+                            <p:stCondLst>
+                              <p:cond delay="0"/>
+                            </p:stCondLst>
+                            <p:childTnLst>
+                              <p:par>
+                                <p:cTn id="21" presetID="1" presetClass="entr" presetSubtype="0" fill="hold" grpId="0" nodeType="clickEffect">
+                                  <p:stCondLst>
+                                    <p:cond delay="0"/>
+                                  </p:stCondLst>
+                                  <p:childTnLst>
+                                    <p:set>
+                                      <p:cBhvr>
+                                        <p:cTn id="22" dur="1" fill="hold">
+                                          <p:stCondLst>
+                                            <p:cond delay="0"/>
+                                          </p:stCondLst>
+                                        </p:cTn>
+                                        <p:tgtEl>
+                                          <p:spTgt spid="2">
+                                            <p:txEl>
                                               <p:pRg st="4" end="4"/>
+                                            </p:txEl>
+                                          </p:spTgt>
+                                        </p:tgtEl>
+                                        <p:attrNameLst>
+                                          <p:attrName>style.visibility</p:attrName>
+                                        </p:attrNameLst>
+                                      </p:cBhvr>
+                                      <p:to>
+                                        <p:strVal val="visible"/>
+                                      </p:to>
+                                    </p:set>
+                                  </p:childTnLst>
+                                </p:cTn>
+                              </p:par>
+                            </p:childTnLst>
+                          </p:cTn>
+                        </p:par>
+                      </p:childTnLst>
+                    </p:cTn>
+                  </p:par>
+                  <p:par>
+                    <p:cTn id="23" fill="hold">
+                      <p:stCondLst>
+                        <p:cond delay="indefinite"/>
+                      </p:stCondLst>
+                      <p:childTnLst>
+                        <p:par>
+                          <p:cTn id="24" fill="hold">
+                            <p:stCondLst>
+                              <p:cond delay="0"/>
+                            </p:stCondLst>
+                            <p:childTnLst>
+                              <p:par>
+                                <p:cTn id="25" presetID="1" presetClass="entr" presetSubtype="0" fill="hold" grpId="0" nodeType="clickEffect">
+                                  <p:stCondLst>
+                                    <p:cond delay="0"/>
+                                  </p:stCondLst>
+                                  <p:childTnLst>
+                                    <p:set>
+                                      <p:cBhvr>
+                                        <p:cTn id="26" dur="1" fill="hold">
+                                          <p:stCondLst>
+                                            <p:cond delay="0"/>
+                                          </p:stCondLst>
+                                        </p:cTn>
+                                        <p:tgtEl>
+                                          <p:spTgt spid="2">
+                                            <p:txEl>
+                                              <p:pRg st="6" end="6"/>
+                                            </p:txEl>
+                                          </p:spTgt>
+                                        </p:tgtEl>
+                                        <p:attrNameLst>
+                                          <p:attrName>style.visibility</p:attrName>
+                                        </p:attrNameLst>
+                                      </p:cBhvr>
+                                      <p:to>
+                                        <p:strVal val="visible"/>
+                                      </p:to>
+                                    </p:set>
+                                  </p:childTnLst>
+                                </p:cTn>
+                              </p:par>
+                            </p:childTnLst>
+                          </p:cTn>
+                        </p:par>
+                      </p:childTnLst>
+                    </p:cTn>
+                  </p:par>
+                  <p:par>
+                    <p:cTn id="27" fill="hold">
+                      <p:stCondLst>
+                        <p:cond delay="indefinite"/>
+                      </p:stCondLst>
+                      <p:childTnLst>
+                        <p:par>
+                          <p:cTn id="28" fill="hold">
+                            <p:stCondLst>
+                              <p:cond delay="0"/>
+                            </p:stCondLst>
+                            <p:childTnLst>
+                              <p:par>
+                                <p:cTn id="29" presetID="1" presetClass="entr" presetSubtype="0" fill="hold" grpId="0" nodeType="clickEffect">
+                                  <p:stCondLst>
+                                    <p:cond delay="0"/>
+                                  </p:stCondLst>
+                                  <p:childTnLst>
+                                    <p:set>
+                                      <p:cBhvr>
+                                        <p:cTn id="30" dur="1" fill="hold">
+                                          <p:stCondLst>
+                                            <p:cond delay="0"/>
+                                          </p:stCondLst>
+                                        </p:cTn>
+                                        <p:tgtEl>
+                                          <p:spTgt spid="2">
+                                            <p:txEl>
+                                              <p:pRg st="7" end="7"/>
+                                            </p:txEl>
+                                          </p:spTgt>
+                                        </p:tgtEl>
+                                        <p:attrNameLst>
+                                          <p:attrName>style.visibility</p:attrName>
+                                        </p:attrNameLst>
+                                      </p:cBhvr>
+                                      <p:to>
+                                        <p:strVal val="visible"/>
+                                      </p:to>
+                                    </p:set>
+                                  </p:childTnLst>
+                                </p:cTn>
+                              </p:par>
+                            </p:childTnLst>
+                          </p:cTn>
+                        </p:par>
+                      </p:childTnLst>
+                    </p:cTn>
+                  </p:par>
+                  <p:par>
+                    <p:cTn id="31" fill="hold">
+                      <p:stCondLst>
+                        <p:cond delay="indefinite"/>
+                      </p:stCondLst>
+                      <p:childTnLst>
+                        <p:par>
+                          <p:cTn id="32" fill="hold">
+                            <p:stCondLst>
+                              <p:cond delay="0"/>
+                            </p:stCondLst>
+                            <p:childTnLst>
+                              <p:par>
+                                <p:cTn id="33" presetID="1" presetClass="entr" presetSubtype="0" fill="hold" grpId="0" nodeType="clickEffect">
+                                  <p:stCondLst>
+                                    <p:cond delay="0"/>
+                                  </p:stCondLst>
+                                  <p:childTnLst>
+                                    <p:set>
+                                      <p:cBhvr>
+                                        <p:cTn id="34" dur="1" fill="hold">
+                                          <p:stCondLst>
+                                            <p:cond delay="0"/>
+                                          </p:stCondLst>
+                                        </p:cTn>
+                                        <p:tgtEl>
+                                          <p:spTgt spid="2">
+                                            <p:txEl>
+                                              <p:pRg st="8" end="8"/>
+                                            </p:txEl>
+                                          </p:spTgt>
+                                        </p:tgtEl>
+                                        <p:attrNameLst>
+                                          <p:attrName>style.visibility</p:attrName>
+                                        </p:attrNameLst>
+                                      </p:cBhvr>
+                                      <p:to>
+                                        <p:strVal val="visible"/>
+                                      </p:to>
+                                    </p:set>
+                                  </p:childTnLst>
+                                </p:cTn>
+                              </p:par>
+                            </p:childTnLst>
+                          </p:cTn>
+                        </p:par>
+                      </p:childTnLst>
+                    </p:cTn>
+                  </p:par>
+                  <p:par>
+                    <p:cTn id="35" fill="hold">
+                      <p:stCondLst>
+                        <p:cond delay="indefinite"/>
+                      </p:stCondLst>
+                      <p:childTnLst>
+                        <p:par>
+                          <p:cTn id="36" fill="hold">
+                            <p:stCondLst>
+                              <p:cond delay="0"/>
+                            </p:stCondLst>
+                            <p:childTnLst>
+                              <p:par>
+                                <p:cTn id="37" presetID="1" presetClass="entr" presetSubtype="0" fill="hold" grpId="0" nodeType="clickEffect">
+                                  <p:stCondLst>
+                                    <p:cond delay="0"/>
+                                  </p:stCondLst>
+                                  <p:childTnLst>
+                                    <p:set>
+                                      <p:cBhvr>
+                                        <p:cTn id="38" dur="1" fill="hold">
+                                          <p:stCondLst>
+                                            <p:cond delay="0"/>
+                                          </p:stCondLst>
+                                        </p:cTn>
+                                        <p:tgtEl>
+                                          <p:spTgt spid="2">
+                                            <p:txEl>
+                                              <p:pRg st="9" end="9"/>
+                                            </p:txEl>
+                                          </p:spTgt>
+                                        </p:tgtEl>
+                                        <p:attrNameLst>
+                                          <p:attrName>style.visibility</p:attrName>
+                                        </p:attrNameLst>
+                                      </p:cBhvr>
+                                      <p:to>
+                                        <p:strVal val="visible"/>
+                                      </p:to>
+                                    </p:set>
+                                  </p:childTnLst>
+                                </p:cTn>
+                              </p:par>
+                            </p:childTnLst>
+                          </p:cTn>
+                        </p:par>
+                      </p:childTnLst>
+                    </p:cTn>
+                  </p:par>
+                  <p:par>
+                    <p:cTn id="39" fill="hold">
+                      <p:stCondLst>
+                        <p:cond delay="indefinite"/>
+                      </p:stCondLst>
+                      <p:childTnLst>
+                        <p:par>
+                          <p:cTn id="40" fill="hold">
+                            <p:stCondLst>
+                              <p:cond delay="0"/>
+                            </p:stCondLst>
+                            <p:childTnLst>
+                              <p:par>
+                                <p:cTn id="41" presetID="1" presetClass="entr" presetSubtype="0" fill="hold" grpId="0" nodeType="clickEffect">
+                                  <p:stCondLst>
+                                    <p:cond delay="0"/>
+                                  </p:stCondLst>
+                                  <p:childTnLst>
+                                    <p:set>
+                                      <p:cBhvr>
+                                        <p:cTn id="42" dur="1" fill="hold">
+                                          <p:stCondLst>
+                                            <p:cond delay="0"/>
+                                          </p:stCondLst>
+                                        </p:cTn>
+                                        <p:tgtEl>
+                                          <p:spTgt spid="2">
+                                            <p:txEl>
+                                              <p:pRg st="10" end="10"/>
                                             </p:txEl>
                                           </p:spTgt>
                                         </p:tgtEl>
